--- a/grand_pivot_deck.pptx
+++ b/grand_pivot_deck.pptx
@@ -3171,7 +3171,7 @@
               </a:defRPr>
             </a:pPr>
             <a:r>
-              <a:t>USD/TWD 31.83  ×  台股 45,511（09/15 收盤）  ×  10yr 5.01%</a:t>
+              <a:t>USD/TWD 31.76  ×  台股 47,368（09/20 收盤）  ×  10yr 5.00%</a:t>
             </a:r>
           </a:p>
         </p:txBody>
@@ -3209,7 +3209,7 @@
               </a:defRPr>
             </a:pPr>
             <a:r>
-              <a:t>數據基準：09/15 最新收盤（執行時自動抓取）｜ 龍九控股策略框架 9/6 核准</a:t>
+              <a:t>數據基準：09/20 最新收盤（執行時自動抓取）｜ 龍九控股策略框架 9/6 核准</a:t>
             </a:r>
           </a:p>
           <a:p>
@@ -3370,7 +3370,7 @@
               </a:defRPr>
             </a:pPr>
             <a:r>
-              <a:t>1️⃣ 【您】整池 1,200萬×4.5成 = 540萬@2.77%質押（尚未撥款（對保完成後約 2 週，預估 2026-09-25））</a:t>
+              <a:t>1️⃣ 【您】整池 1,200萬×4.5成 = 540萬@2.77%質押（尚未撥款（對保完成後約 2 週，預估 2026-10-05））</a:t>
             </a:r>
           </a:p>
           <a:p>
@@ -3744,7 +3744,7 @@
               </a:defRPr>
             </a:pPr>
             <a:r>
-              <a:t>💰 匯率 31.83：台幣偏強 → 不再加碼美元曝險，等 10 月重評估</a:t>
+              <a:t>💰 匯率 31.76：台幣偏強 → 不再加碼美元曝險，等 10 月重評估</a:t>
             </a:r>
           </a:p>
           <a:p>
@@ -3798,7 +3798,7 @@
               </a:defRPr>
             </a:pPr>
             <a:r>
-              <a:t>📈 台股 45,511（09/15 收盤，單日 -0.77%）→ 無系統風險，不恐慌不追高</a:t>
+              <a:t>📈 台股 47,368（09/20 收盤，單日 +0.40%）→ 無系統風險，不恐慌不追高</a:t>
             </a:r>
           </a:p>
           <a:p>
@@ -3943,7 +3943,7 @@
               </a:defRPr>
             </a:pPr>
             <a:r>
-              <a:t>即時市場：台股 45,511（-0.77%）</a:t>
+              <a:t>即時市場：台股 47,368（+0.40%）</a:t>
             </a:r>
           </a:p>
         </p:txBody>
@@ -4016,7 +4016,7 @@
               </a:defRPr>
             </a:pPr>
             <a:r>
-              <a:t>📈 台股最新收盤 45,511（單日 -0.77%），asof 09/15</a:t>
+              <a:t>📈 台股最新收盤 47,368（單日 +0.40%），asof 09/20</a:t>
             </a:r>
           </a:p>
           <a:p>
@@ -4058,7 +4058,7 @@
               </a:defRPr>
             </a:pPr>
             <a:r>
-              <a:t>💵 USD/TWD 31.83 — 台幣偏強（較 7/29 高點 32.38 +1.7%）</a:t>
+              <a:t>💵 USD/TWD 31.76 — 台幣偏強（較 7/29 高點 32.38 +1.9%）</a:t>
             </a:r>
           </a:p>
           <a:p>
@@ -4100,7 +4100,7 @@
               </a:defRPr>
             </a:pPr>
             <a:r>
-              <a:t>📡 10yr 5.01% / 30yr 5.38% — 已達 5.30 凍結線，新增質押全域凍結</a:t>
+              <a:t>📡 10yr 5.00% / 30yr 5.33% — 已達 5.30 凍結線，新增質押全域凍結</a:t>
             </a:r>
           </a:p>
           <a:p>
@@ -4176,7 +4176,7 @@
               </a:defRPr>
             </a:pPr>
             <a:r>
-              <a:t>匯率 31.83 — 台幣偏強，美元曝險的雙面刃</a:t>
+              <a:t>匯率 31.76 — 台幣偏強，美元曝險的雙面刃</a:t>
             </a:r>
           </a:p>
         </p:txBody>
@@ -4264,7 +4264,7 @@
               </a:defRPr>
             </a:pPr>
             <a:r>
-              <a:t>     7/29 高點 32.38 → 如今 31.83（台幣偏強 +1.7%）</a:t>
+              <a:t>     7/29 高點 32.38 → 如今 31.76（台幣偏強 +1.9%）</a:t>
             </a:r>
           </a:p>
           <a:p>
@@ -4501,7 +4501,7 @@
               </a:defRPr>
             </a:pPr>
             <a:r>
-              <a:t>證券總市值 2,922,190 元（snapshot 9/4）— 台股 8/24 裁示暫緩、9/6 全面觀望</a:t>
+              <a:t>證券總市值 2,956,130 元（snapshot 9/4）— 台股 8/24 裁示暫緩、9/6 全面觀望</a:t>
             </a:r>
           </a:p>
         </p:txBody>
@@ -4566,112 +4566,112 @@
               </a:defRPr>
             </a:pPr>
             <a:r>
-              <a:t>   0050        214,000  (+26.0%)  元大台灣50</a:t>
-            </a:r>
-          </a:p>
-          <a:p>
-            <a:pPr>
-              <a:spcAft>
-                <a:spcPts val="500"/>
-              </a:spcAft>
-              <a:defRPr sz="1500">
-                <a:solidFill>
-                  <a:srgbClr val="FFFFFF"/>
-                </a:solidFill>
-              </a:defRPr>
-            </a:pPr>
-            <a:r>
-              <a:t>   006208      489,600  (+24.3%)  富邦台50</a:t>
-            </a:r>
-          </a:p>
-          <a:p>
-            <a:pPr>
-              <a:spcAft>
-                <a:spcPts val="500"/>
-              </a:spcAft>
-              <a:defRPr sz="1500">
-                <a:solidFill>
-                  <a:srgbClr val="FFFFFF"/>
-                </a:solidFill>
-              </a:defRPr>
-            </a:pPr>
-            <a:r>
-              <a:t>   009816      253,760  (+27.0%)  凱基台灣TOP50</a:t>
-            </a:r>
-          </a:p>
-          <a:p>
-            <a:pPr>
-              <a:spcAft>
-                <a:spcPts val="500"/>
-              </a:spcAft>
-              <a:defRPr sz="1500">
-                <a:solidFill>
-                  <a:srgbClr val="FFFFFF"/>
-                </a:solidFill>
-              </a:defRPr>
-            </a:pPr>
-            <a:r>
-              <a:t>   00646        76,150  (+6.3%)  元大S&amp;P500</a:t>
-            </a:r>
-          </a:p>
-          <a:p>
-            <a:pPr>
-              <a:spcAft>
-                <a:spcPts val="500"/>
-              </a:spcAft>
-              <a:defRPr sz="1500">
-                <a:solidFill>
-                  <a:srgbClr val="FFFFFF"/>
-                </a:solidFill>
-              </a:defRPr>
-            </a:pPr>
-            <a:r>
-              <a:t>   00713       128,700  (+17.4%)  元大台灣高息低波</a:t>
-            </a:r>
-          </a:p>
-          <a:p>
-            <a:pPr>
-              <a:spcAft>
-                <a:spcPts val="500"/>
-              </a:spcAft>
-              <a:defRPr sz="1500">
-                <a:solidFill>
-                  <a:srgbClr val="FFFFFF"/>
-                </a:solidFill>
-              </a:defRPr>
-            </a:pPr>
-            <a:r>
-              <a:t>   00878       514,500  (+26.2%)  國泰永續高股息</a:t>
-            </a:r>
-          </a:p>
-          <a:p>
-            <a:pPr>
-              <a:spcAft>
-                <a:spcPts val="500"/>
-              </a:spcAft>
-              <a:defRPr sz="1500">
-                <a:solidFill>
-                  <a:srgbClr val="FFFFFF"/>
-                </a:solidFill>
-              </a:defRPr>
-            </a:pPr>
-            <a:r>
-              <a:t>   0056         55,500  (+49.4%)  元大高股息</a:t>
-            </a:r>
-          </a:p>
-          <a:p>
-            <a:pPr>
-              <a:spcAft>
-                <a:spcPts val="500"/>
-              </a:spcAft>
-              <a:defRPr sz="1500">
-                <a:solidFill>
-                  <a:srgbClr val="FFFFFF"/>
-                </a:solidFill>
-              </a:defRPr>
-            </a:pPr>
-            <a:r>
-              <a:t>   00981A      235,040  (+11.6%)  統一台灣高息動能</a:t>
+              <a:t>   0050        218,500  (+28.7%)  元大台灣50</a:t>
+            </a:r>
+          </a:p>
+          <a:p>
+            <a:pPr>
+              <a:spcAft>
+                <a:spcPts val="500"/>
+              </a:spcAft>
+              <a:defRPr sz="1500">
+                <a:solidFill>
+                  <a:srgbClr val="FFFFFF"/>
+                </a:solidFill>
+              </a:defRPr>
+            </a:pPr>
+            <a:r>
+              <a:t>   006208      500,800  (+27.2%)  富邦台50</a:t>
+            </a:r>
+          </a:p>
+          <a:p>
+            <a:pPr>
+              <a:spcAft>
+                <a:spcPts val="500"/>
+              </a:spcAft>
+              <a:defRPr sz="1500">
+                <a:solidFill>
+                  <a:srgbClr val="FFFFFF"/>
+                </a:solidFill>
+              </a:defRPr>
+            </a:pPr>
+            <a:r>
+              <a:t>   009816      259,040  (+29.6%)  凱基台灣TOP50</a:t>
+            </a:r>
+          </a:p>
+          <a:p>
+            <a:pPr>
+              <a:spcAft>
+                <a:spcPts val="500"/>
+              </a:spcAft>
+              <a:defRPr sz="1500">
+                <a:solidFill>
+                  <a:srgbClr val="FFFFFF"/>
+                </a:solidFill>
+              </a:defRPr>
+            </a:pPr>
+            <a:r>
+              <a:t>   00646        76,600  (+7.0%)  元大S&amp;P500</a:t>
+            </a:r>
+          </a:p>
+          <a:p>
+            <a:pPr>
+              <a:spcAft>
+                <a:spcPts val="500"/>
+              </a:spcAft>
+              <a:defRPr sz="1500">
+                <a:solidFill>
+                  <a:srgbClr val="FFFFFF"/>
+                </a:solidFill>
+              </a:defRPr>
+            </a:pPr>
+            <a:r>
+              <a:t>   00713       130,100  (+18.7%)  元大台灣高息低波</a:t>
+            </a:r>
+          </a:p>
+          <a:p>
+            <a:pPr>
+              <a:spcAft>
+                <a:spcPts val="500"/>
+              </a:spcAft>
+              <a:defRPr sz="1500">
+                <a:solidFill>
+                  <a:srgbClr val="FFFFFF"/>
+                </a:solidFill>
+              </a:defRPr>
+            </a:pPr>
+            <a:r>
+              <a:t>   00878       523,650  (+28.5%)  國泰永續高股息</a:t>
+            </a:r>
+          </a:p>
+          <a:p>
+            <a:pPr>
+              <a:spcAft>
+                <a:spcPts val="500"/>
+              </a:spcAft>
+              <a:defRPr sz="1500">
+                <a:solidFill>
+                  <a:srgbClr val="FFFFFF"/>
+                </a:solidFill>
+              </a:defRPr>
+            </a:pPr>
+            <a:r>
+              <a:t>   0056         56,850  (+53.0%)  元大高股息</a:t>
+            </a:r>
+          </a:p>
+          <a:p>
+            <a:pPr>
+              <a:spcAft>
+                <a:spcPts val="500"/>
+              </a:spcAft>
+              <a:defRPr sz="1500">
+                <a:solidFill>
+                  <a:srgbClr val="FFFFFF"/>
+                </a:solidFill>
+              </a:defRPr>
+            </a:pPr>
+            <a:r>
+              <a:t>   00981A      230,640  (+9.5%)  主動統一台灣成長</a:t>
             </a:r>
           </a:p>
           <a:p>
@@ -4866,7 +4866,7 @@
               </a:defRPr>
             </a:pPr>
             <a:r>
-              <a:t>基金總市值 12,628,144 元（snapshot 9/4 報價日 9/3）</a:t>
+              <a:t>基金總市值 12,669,739 元（snapshot 9/4 報價日 9/3）</a:t>
             </a:r>
           </a:p>
         </p:txBody>
@@ -4919,37 +4919,37 @@
               </a:defRPr>
             </a:pPr>
             <a:r>
-              <a:t>     富達全球動能B月配美元 5,853,439 元 — 月配息主力</a:t>
-            </a:r>
-          </a:p>
-          <a:p>
-            <a:pPr>
-              <a:spcAft>
-                <a:spcPts val="500"/>
-              </a:spcAft>
-              <a:defRPr sz="1500">
-                <a:solidFill>
-                  <a:srgbClr val="FFFFFF"/>
-                </a:solidFill>
-              </a:defRPr>
-            </a:pPr>
-            <a:r>
-              <a:t>     貝萊德B11 強化穩定月配息 4,981,060 元（原 MMF 500 萬贖回款轉申購；⛔ 原「500萬標案預備金」已作廢 9/11）</a:t>
-            </a:r>
-          </a:p>
-          <a:p>
-            <a:pPr>
-              <a:spcAft>
-                <a:spcPts val="500"/>
-              </a:spcAft>
-              <a:defRPr sz="1500">
-                <a:solidFill>
-                  <a:srgbClr val="FFFFFF"/>
-                </a:solidFill>
-              </a:defRPr>
-            </a:pPr>
-            <a:r>
-              <a:t>     聯博全球多元收益AD美元月配 971,483 元</a:t>
+              <a:t>     富達全球動能B月配美元 5,877,925 元 — 月配息主力</a:t>
+            </a:r>
+          </a:p>
+          <a:p>
+            <a:pPr>
+              <a:spcAft>
+                <a:spcPts val="500"/>
+              </a:spcAft>
+              <a:defRPr sz="1500">
+                <a:solidFill>
+                  <a:srgbClr val="FFFFFF"/>
+                </a:solidFill>
+              </a:defRPr>
+            </a:pPr>
+            <a:r>
+              <a:t>     貝萊德B11 強化穩定月配息 4,999,218 元（原 MMF 500 萬贖回款轉申購；⛔ 原「500萬標案預備金」已作廢 9/11）</a:t>
+            </a:r>
+          </a:p>
+          <a:p>
+            <a:pPr>
+              <a:spcAft>
+                <a:spcPts val="500"/>
+              </a:spcAft>
+              <a:defRPr sz="1500">
+                <a:solidFill>
+                  <a:srgbClr val="FFFFFF"/>
+                </a:solidFill>
+              </a:defRPr>
+            </a:pPr>
+            <a:r>
+              <a:t>     聯博全球多元收益AD美元月配 978,870 元</a:t>
             </a:r>
           </a:p>
           <a:p>
@@ -5416,7 +5416,7 @@
               </a:defRPr>
             </a:pPr>
             <a:r>
-              <a:t>穿透：台股 7.5%｜美股 40.6%（科技15.4）｜防守配息 17.4%｜債券 27.6%｜現金 3.4%</a:t>
+              <a:t>穿透：台股 7.5%｜美股 39.4%（科技15.2）｜防守配息 17.4%｜債券 28.8%｜現金 3.5%</a:t>
             </a:r>
           </a:p>
         </p:txBody>
@@ -5595,7 +5595,7 @@
               </a:defRPr>
             </a:pPr>
             <a:r>
-              <a:t>📊 現金/安全網穿透 3.4%：底線 70 萬已守住</a:t>
+              <a:t>📊 現金/安全網穿透 3.5%：底線 70 萬已守住</a:t>
             </a:r>
           </a:p>
           <a:p>
@@ -5744,7 +5744,7 @@
               </a:defRPr>
             </a:pPr>
             <a:r>
-              <a:t>🔴 情境A：升息（30yr 5.38% 警戒區，CPI 9/11 關鍵）</a:t>
+              <a:t>🔴 情境A：升息（30yr 5.33% 警戒區，CPI 9/11 關鍵）</a:t>
             </a:r>
           </a:p>
           <a:p>
@@ -6019,7 +6019,7 @@
               </a:defRPr>
             </a:pPr>
             <a:r>
-              <a:t>📅 質押：🔍 質押：擔保池 1,200萬（富達600＋聯博100＋貝萊德B11 500）×4.5成 = 540萬@2.77%；尚未撥款（對保完成後約 2 週，預估 2026-09-25） → 用途：優先清償 500萬高息負債（保單質押 400萬@4.0% ＋ 券商質押 100萬@3.92%）— 月息 16,600 → 12,465，月省約 4,135（2026-09-12 裁示；10月標案押標金不預留，9月底評估）</a:t>
+              <a:t>📅 質押：🔍 質押：擔保池 1,200萬（富達600＋聯博100＋貝萊德B11 500）×4.5成 = 540萬@2.77%；尚未撥款（對保完成後約 2 週，預估 2026-10-05） → 用途：優先清償 500萬高息負債（保單質押 400萬@4.0% ＋ 券商質押 100萬@3.92%）— 月息 16,600 → 12,465，月省約 4,135（2026-09-12 裁示；10月標案押標金不預留，9月底評估）</a:t>
             </a:r>
           </a:p>
           <a:p>

--- a/grand_pivot_deck.pptx
+++ b/grand_pivot_deck.pptx
@@ -3171,7 +3171,7 @@
               </a:defRPr>
             </a:pPr>
             <a:r>
-              <a:t>USD/TWD 31.76  ×  台股 47,368（09/20 收盤）  ×  10yr 5.00%</a:t>
+              <a:t>USD/TWD 31.67  ×  台股 48,348（09/22 收盤）  ×  10yr 4.96%</a:t>
             </a:r>
           </a:p>
         </p:txBody>
@@ -3209,7 +3209,7 @@
               </a:defRPr>
             </a:pPr>
             <a:r>
-              <a:t>數據基準：09/20 最新收盤（執行時自動抓取）｜ 龍九控股策略框架 9/6 核准</a:t>
+              <a:t>數據基準：09/22 最新收盤（執行時自動抓取）｜ 龍九控股策略框架 9/6 核准</a:t>
             </a:r>
           </a:p>
           <a:p>
@@ -3370,7 +3370,7 @@
               </a:defRPr>
             </a:pPr>
             <a:r>
-              <a:t>1️⃣ 【您】整池 1,200萬×4.5成 = 540萬@2.77%質押（尚未撥款（對保完成後約 2 週，預估 2026-10-05））</a:t>
+              <a:t>1️⃣ 【您】整池 1,200萬×4.5成 = 540萬@2.77%質押（❌ 尚未撥款（2026-09-21 對保完成；預計 2026-09-29 撥款））</a:t>
             </a:r>
           </a:p>
           <a:p>
@@ -3744,7 +3744,7 @@
               </a:defRPr>
             </a:pPr>
             <a:r>
-              <a:t>💰 匯率 31.76：台幣偏強 → 不再加碼美元曝險，等 10 月重評估</a:t>
+              <a:t>💰 匯率 31.67：台幣偏強 → 不再加碼美元曝險，等 10 月重評估</a:t>
             </a:r>
           </a:p>
           <a:p>
@@ -3798,7 +3798,7 @@
               </a:defRPr>
             </a:pPr>
             <a:r>
-              <a:t>📈 台股 47,368（09/20 收盤，單日 +0.40%）→ 無系統風險，不恐慌不追高</a:t>
+              <a:t>📈 台股 48,348（09/22 收盤，單日 +1.32%）→ 無系統風險，不恐慌不追高</a:t>
             </a:r>
           </a:p>
           <a:p>
@@ -3943,7 +3943,7 @@
               </a:defRPr>
             </a:pPr>
             <a:r>
-              <a:t>即時市場：台股 47,368（+0.40%）</a:t>
+              <a:t>即時市場：台股 48,348（+1.32%）</a:t>
             </a:r>
           </a:p>
         </p:txBody>
@@ -3978,7 +3978,7 @@
               </a:defRPr>
             </a:pPr>
             <a:r>
-              <a:t>台股位處近一月高檔區 — 無系統性風險 ｜ 近一月低點 44,719</a:t>
+              <a:t>台股位處近一月高檔區 — 無系統性風險 ｜ 近一月低點 44,762</a:t>
             </a:r>
           </a:p>
         </p:txBody>
@@ -4016,7 +4016,7 @@
               </a:defRPr>
             </a:pPr>
             <a:r>
-              <a:t>📈 台股最新收盤 47,368（單日 +0.40%），asof 09/20</a:t>
+              <a:t>📈 台股最新收盤 48,348（單日 +1.32%），asof 09/22</a:t>
             </a:r>
           </a:p>
           <a:p>
@@ -4058,7 +4058,7 @@
               </a:defRPr>
             </a:pPr>
             <a:r>
-              <a:t>💵 USD/TWD 31.76 — 台幣偏強（較 7/29 高點 32.38 +1.9%）</a:t>
+              <a:t>💵 USD/TWD 31.67 — 台幣偏強（較 7/29 高點 32.38 +2.2%）</a:t>
             </a:r>
           </a:p>
           <a:p>
@@ -4100,7 +4100,7 @@
               </a:defRPr>
             </a:pPr>
             <a:r>
-              <a:t>📡 10yr 5.00% / 30yr 5.33% — 已達 5.30 凍結線，新增質押全域凍結</a:t>
+              <a:t>📡 10yr 4.96% / 30yr 5.30% — 5.30% 警戒區（5.20-5.30），未觸發凍結</a:t>
             </a:r>
           </a:p>
           <a:p>
@@ -4176,7 +4176,7 @@
               </a:defRPr>
             </a:pPr>
             <a:r>
-              <a:t>匯率 31.76 — 台幣偏強，美元曝險的雙面刃</a:t>
+              <a:t>匯率 31.67 — 台幣偏強，美元曝險的雙面刃</a:t>
             </a:r>
           </a:p>
         </p:txBody>
@@ -4264,7 +4264,7 @@
               </a:defRPr>
             </a:pPr>
             <a:r>
-              <a:t>     7/29 高點 32.38 → 如今 31.76（台幣偏強 +1.9%）</a:t>
+              <a:t>     7/29 高點 32.38 → 如今 31.67（台幣偏強 +2.2%）</a:t>
             </a:r>
           </a:p>
           <a:p>
@@ -4501,7 +4501,7 @@
               </a:defRPr>
             </a:pPr>
             <a:r>
-              <a:t>證券總市值 2,956,130 元（snapshot 9/4）— 台股 8/24 裁示暫緩、9/6 全面觀望</a:t>
+              <a:t>證券總市值 2,987,490 元（snapshot 9/4）— 台股 8/24 裁示暫緩、9/6 全面觀望</a:t>
             </a:r>
           </a:p>
         </p:txBody>
@@ -4866,7 +4866,7 @@
               </a:defRPr>
             </a:pPr>
             <a:r>
-              <a:t>基金總市值 12,669,739 元（snapshot 9/4 報價日 9/3）</a:t>
+              <a:t>基金總市值 12,626,051 元（snapshot 9/4 報價日 9/3）</a:t>
             </a:r>
           </a:p>
         </p:txBody>
@@ -4919,37 +4919,37 @@
               </a:defRPr>
             </a:pPr>
             <a:r>
-              <a:t>     富達全球動能B月配美元 5,877,925 元 — 月配息主力</a:t>
-            </a:r>
-          </a:p>
-          <a:p>
-            <a:pPr>
-              <a:spcAft>
-                <a:spcPts val="500"/>
-              </a:spcAft>
-              <a:defRPr sz="1500">
-                <a:solidFill>
-                  <a:srgbClr val="FFFFFF"/>
-                </a:solidFill>
-              </a:defRPr>
-            </a:pPr>
-            <a:r>
-              <a:t>     貝萊德B11 強化穩定月配息 4,999,218 元（原 MMF 500 萬贖回款轉申購；⛔ 原「500萬標案預備金」已作廢 9/11）</a:t>
-            </a:r>
-          </a:p>
-          <a:p>
-            <a:pPr>
-              <a:spcAft>
-                <a:spcPts val="500"/>
-              </a:spcAft>
-              <a:defRPr sz="1500">
-                <a:solidFill>
-                  <a:srgbClr val="FFFFFF"/>
-                </a:solidFill>
-              </a:defRPr>
-            </a:pPr>
-            <a:r>
-              <a:t>     聯博全球多元收益AD美元月配 978,870 元</a:t>
+              <a:t>     富達全球動能B月配美元 5,846,312 元 — 月配息主力</a:t>
+            </a:r>
+          </a:p>
+          <a:p>
+            <a:pPr>
+              <a:spcAft>
+                <a:spcPts val="500"/>
+              </a:spcAft>
+              <a:defRPr sz="1500">
+                <a:solidFill>
+                  <a:srgbClr val="FFFFFF"/>
+                </a:solidFill>
+              </a:defRPr>
+            </a:pPr>
+            <a:r>
+              <a:t>     貝萊德B11 強化穩定月配息 4,965,404 元（原 MMF 500 萬贖回款轉申購；⛔ 原「500萬標案預備金」已作廢 9/11）</a:t>
+            </a:r>
+          </a:p>
+          <a:p>
+            <a:pPr>
+              <a:spcAft>
+                <a:spcPts val="500"/>
+              </a:spcAft>
+              <a:defRPr sz="1500">
+                <a:solidFill>
+                  <a:srgbClr val="FFFFFF"/>
+                </a:solidFill>
+              </a:defRPr>
+            </a:pPr>
+            <a:r>
+              <a:t>     聯博全球多元收益AD美元月配 973,952 元</a:t>
             </a:r>
           </a:p>
           <a:p>
@@ -5416,7 +5416,7 @@
               </a:defRPr>
             </a:pPr>
             <a:r>
-              <a:t>穿透：台股 7.5%｜美股 39.4%（科技15.2）｜防守配息 17.4%｜債券 28.8%｜現金 3.5%</a:t>
+              <a:t>穿透：台股 7.7%｜美股 39.3%（科技15.2）｜防守配息 17.3%｜債券 28.7%｜現金 3.5%</a:t>
             </a:r>
           </a:p>
         </p:txBody>
@@ -5484,7 +5484,7 @@
               </a:defRPr>
             </a:pPr>
             <a:r>
-              <a:t>     台股穿透 7.5% → 偏低，但觀望期凍結新增</a:t>
+              <a:t>     台股穿透 7.7% → 偏低，但觀望期凍結新增</a:t>
             </a:r>
           </a:p>
           <a:p>
@@ -5744,7 +5744,7 @@
               </a:defRPr>
             </a:pPr>
             <a:r>
-              <a:t>🔴 情境A：升息（30yr 5.33% 警戒區，CPI 9/11 關鍵）</a:t>
+              <a:t>🔴 情境A：升息（30yr 5.30% 警戒區，CPI 9/11 關鍵）</a:t>
             </a:r>
           </a:p>
           <a:p>
@@ -6019,7 +6019,7 @@
               </a:defRPr>
             </a:pPr>
             <a:r>
-              <a:t>📅 質押：🔍 質押：擔保池 1,200萬（富達600＋聯博100＋貝萊德B11 500）×4.5成 = 540萬@2.77%；尚未撥款（對保完成後約 2 週，預估 2026-10-05） → 用途：優先清償 500萬高息負債（保單質押 400萬@4.0% ＋ 券商質押 100萬@3.92%）— 月息 16,600 → 12,465，月省約 4,135（2026-09-12 裁示；10月標案押標金不預留，9月底評估）</a:t>
+              <a:t>📅 質押：🔍 質押：擔保池 1,200萬（富達600＋聯博100＋貝萊德B11 500）×4.5成 = 540萬@2.77%；❌ 尚未撥款（2026-09-21 對保完成；預計 2026-09-29 撥款） → 用途：優先清償 500萬高息負債（保單質押 400萬@4.0% ＋ 券商質押 100萬@3.92%）— 月息 16,600 → 12,465，月省約 4,135（2026-09-12 裁示；10月標案押標金不預留，9月底評估）</a:t>
             </a:r>
           </a:p>
           <a:p>

--- a/grand_pivot_deck.pptx
+++ b/grand_pivot_deck.pptx
@@ -3171,7 +3171,7 @@
               </a:defRPr>
             </a:pPr>
             <a:r>
-              <a:t>USD/TWD 31.67  ×  台股 48,348（09/22 收盤）  ×  10yr 4.96%</a:t>
+              <a:t>USD/TWD 31.69  ×  台股 48,025（09/24 收盤）  ×  10yr 5.18%</a:t>
             </a:r>
           </a:p>
         </p:txBody>
@@ -3209,7 +3209,7 @@
               </a:defRPr>
             </a:pPr>
             <a:r>
-              <a:t>數據基準：09/22 最新收盤（執行時自動抓取）｜ 龍九控股策略框架 9/6 核准</a:t>
+              <a:t>數據基準：09/24 最新收盤（執行時自動抓取）｜ 龍九控股策略框架 9/6 核准</a:t>
             </a:r>
           </a:p>
           <a:p>
@@ -3744,7 +3744,7 @@
               </a:defRPr>
             </a:pPr>
             <a:r>
-              <a:t>💰 匯率 31.67：台幣偏強 → 不再加碼美元曝險，等 10 月重評估</a:t>
+              <a:t>💰 匯率 31.69：台幣偏強 → 不再加碼美元曝險，等 10 月重評估</a:t>
             </a:r>
           </a:p>
           <a:p>
@@ -3798,7 +3798,7 @@
               </a:defRPr>
             </a:pPr>
             <a:r>
-              <a:t>📈 台股 48,348（09/22 收盤，單日 +1.32%）→ 無系統風險，不恐慌不追高</a:t>
+              <a:t>📈 台股 48,025（09/24 收盤，單日 -0.28%）→ 無系統風險，不恐慌不追高</a:t>
             </a:r>
           </a:p>
           <a:p>
@@ -3943,7 +3943,7 @@
               </a:defRPr>
             </a:pPr>
             <a:r>
-              <a:t>即時市場：台股 48,348（+1.32%）</a:t>
+              <a:t>即時市場：台股 48,025（-0.28%）</a:t>
             </a:r>
           </a:p>
         </p:txBody>
@@ -4016,7 +4016,7 @@
               </a:defRPr>
             </a:pPr>
             <a:r>
-              <a:t>📈 台股最新收盤 48,348（單日 +1.32%），asof 09/22</a:t>
+              <a:t>📈 台股最新收盤 48,025（單日 -0.28%），asof 09/24</a:t>
             </a:r>
           </a:p>
           <a:p>
@@ -4058,7 +4058,7 @@
               </a:defRPr>
             </a:pPr>
             <a:r>
-              <a:t>💵 USD/TWD 31.67 — 台幣偏強（較 7/29 高點 32.38 +2.2%）</a:t>
+              <a:t>💵 USD/TWD 31.69 — 台幣偏強（較 7/29 高點 32.38 +2.1%）</a:t>
             </a:r>
           </a:p>
           <a:p>
@@ -4100,7 +4100,7 @@
               </a:defRPr>
             </a:pPr>
             <a:r>
-              <a:t>📡 10yr 4.96% / 30yr 5.30% — 5.30% 警戒區（5.20-5.30），未觸發凍結</a:t>
+              <a:t>📡 10yr 5.18% / 30yr 5.50% — 已達 5.30 凍結線，新增質押全域凍結</a:t>
             </a:r>
           </a:p>
           <a:p>
@@ -4176,7 +4176,7 @@
               </a:defRPr>
             </a:pPr>
             <a:r>
-              <a:t>匯率 31.67 — 台幣偏強，美元曝險的雙面刃</a:t>
+              <a:t>匯率 31.69 — 台幣偏強，美元曝險的雙面刃</a:t>
             </a:r>
           </a:p>
         </p:txBody>
@@ -4264,7 +4264,7 @@
               </a:defRPr>
             </a:pPr>
             <a:r>
-              <a:t>     7/29 高點 32.38 → 如今 31.67（台幣偏強 +2.2%）</a:t>
+              <a:t>     7/29 高點 32.38 → 如今 31.69（台幣偏強 +2.1%）</a:t>
             </a:r>
           </a:p>
           <a:p>
@@ -4501,7 +4501,7 @@
               </a:defRPr>
             </a:pPr>
             <a:r>
-              <a:t>證券總市值 2,987,490 元（snapshot 9/4）— 台股 8/24 裁示暫緩、9/6 全面觀望</a:t>
+              <a:t>證券總市值 3,006,890 元（snapshot 9/4）— 台股 8/24 裁示暫緩、9/6 全面觀望</a:t>
             </a:r>
           </a:p>
         </p:txBody>
@@ -4566,112 +4566,112 @@
               </a:defRPr>
             </a:pPr>
             <a:r>
-              <a:t>   0050        218,500  (+28.7%)  元大台灣50</a:t>
-            </a:r>
-          </a:p>
-          <a:p>
-            <a:pPr>
-              <a:spcAft>
-                <a:spcPts val="500"/>
-              </a:spcAft>
-              <a:defRPr sz="1500">
-                <a:solidFill>
-                  <a:srgbClr val="FFFFFF"/>
-                </a:solidFill>
-              </a:defRPr>
-            </a:pPr>
-            <a:r>
-              <a:t>   006208      500,800  (+27.2%)  富邦台50</a:t>
-            </a:r>
-          </a:p>
-          <a:p>
-            <a:pPr>
-              <a:spcAft>
-                <a:spcPts val="500"/>
-              </a:spcAft>
-              <a:defRPr sz="1500">
-                <a:solidFill>
-                  <a:srgbClr val="FFFFFF"/>
-                </a:solidFill>
-              </a:defRPr>
-            </a:pPr>
-            <a:r>
-              <a:t>   009816      259,040  (+29.6%)  凱基台灣TOP50</a:t>
-            </a:r>
-          </a:p>
-          <a:p>
-            <a:pPr>
-              <a:spcAft>
-                <a:spcPts val="500"/>
-              </a:spcAft>
-              <a:defRPr sz="1500">
-                <a:solidFill>
-                  <a:srgbClr val="FFFFFF"/>
-                </a:solidFill>
-              </a:defRPr>
-            </a:pPr>
-            <a:r>
-              <a:t>   00646        76,600  (+7.0%)  元大S&amp;P500</a:t>
-            </a:r>
-          </a:p>
-          <a:p>
-            <a:pPr>
-              <a:spcAft>
-                <a:spcPts val="500"/>
-              </a:spcAft>
-              <a:defRPr sz="1500">
-                <a:solidFill>
-                  <a:srgbClr val="FFFFFF"/>
-                </a:solidFill>
-              </a:defRPr>
-            </a:pPr>
-            <a:r>
-              <a:t>   00713       130,100  (+18.7%)  元大台灣高息低波</a:t>
-            </a:r>
-          </a:p>
-          <a:p>
-            <a:pPr>
-              <a:spcAft>
-                <a:spcPts val="500"/>
-              </a:spcAft>
-              <a:defRPr sz="1500">
-                <a:solidFill>
-                  <a:srgbClr val="FFFFFF"/>
-                </a:solidFill>
-              </a:defRPr>
-            </a:pPr>
-            <a:r>
-              <a:t>   00878       523,650  (+28.5%)  國泰永續高股息</a:t>
-            </a:r>
-          </a:p>
-          <a:p>
-            <a:pPr>
-              <a:spcAft>
-                <a:spcPts val="500"/>
-              </a:spcAft>
-              <a:defRPr sz="1500">
-                <a:solidFill>
-                  <a:srgbClr val="FFFFFF"/>
-                </a:solidFill>
-              </a:defRPr>
-            </a:pPr>
-            <a:r>
-              <a:t>   0056         56,850  (+53.0%)  元大高股息</a:t>
-            </a:r>
-          </a:p>
-          <a:p>
-            <a:pPr>
-              <a:spcAft>
-                <a:spcPts val="500"/>
-              </a:spcAft>
-              <a:defRPr sz="1500">
-                <a:solidFill>
-                  <a:srgbClr val="FFFFFF"/>
-                </a:solidFill>
-              </a:defRPr>
-            </a:pPr>
-            <a:r>
-              <a:t>   00981A      230,640  (+9.5%)  主動統一台灣成長</a:t>
+              <a:t>   0050        224,900  (+32.5%)  元大台灣50</a:t>
+            </a:r>
+          </a:p>
+          <a:p>
+            <a:pPr>
+              <a:spcAft>
+                <a:spcPts val="500"/>
+              </a:spcAft>
+              <a:defRPr sz="1500">
+                <a:solidFill>
+                  <a:srgbClr val="FFFFFF"/>
+                </a:solidFill>
+              </a:defRPr>
+            </a:pPr>
+            <a:r>
+              <a:t>   006208      514,000  (+30.5%)  富邦台50</a:t>
+            </a:r>
+          </a:p>
+          <a:p>
+            <a:pPr>
+              <a:spcAft>
+                <a:spcPts val="500"/>
+              </a:spcAft>
+              <a:defRPr sz="1500">
+                <a:solidFill>
+                  <a:srgbClr val="FFFFFF"/>
+                </a:solidFill>
+              </a:defRPr>
+            </a:pPr>
+            <a:r>
+              <a:t>   009816      265,600  (+32.9%)  凱基台灣TOP50</a:t>
+            </a:r>
+          </a:p>
+          <a:p>
+            <a:pPr>
+              <a:spcAft>
+                <a:spcPts val="500"/>
+              </a:spcAft>
+              <a:defRPr sz="1500">
+                <a:solidFill>
+                  <a:srgbClr val="FFFFFF"/>
+                </a:solidFill>
+              </a:defRPr>
+            </a:pPr>
+            <a:r>
+              <a:t>   00646        77,600  (+8.4%)  元大S&amp;P500</a:t>
+            </a:r>
+          </a:p>
+          <a:p>
+            <a:pPr>
+              <a:spcAft>
+                <a:spcPts val="500"/>
+              </a:spcAft>
+              <a:defRPr sz="1500">
+                <a:solidFill>
+                  <a:srgbClr val="FFFFFF"/>
+                </a:solidFill>
+              </a:defRPr>
+            </a:pPr>
+            <a:r>
+              <a:t>   00713       127,300  (+16.1%)  元大台灣高息低波</a:t>
+            </a:r>
+          </a:p>
+          <a:p>
+            <a:pPr>
+              <a:spcAft>
+                <a:spcPts val="500"/>
+              </a:spcAft>
+              <a:defRPr sz="1500">
+                <a:solidFill>
+                  <a:srgbClr val="FFFFFF"/>
+                </a:solidFill>
+              </a:defRPr>
+            </a:pPr>
+            <a:r>
+              <a:t>   00878       526,350  (+29.1%)  國泰永續高股息</a:t>
+            </a:r>
+          </a:p>
+          <a:p>
+            <a:pPr>
+              <a:spcAft>
+                <a:spcPts val="500"/>
+              </a:spcAft>
+              <a:defRPr sz="1500">
+                <a:solidFill>
+                  <a:srgbClr val="FFFFFF"/>
+                </a:solidFill>
+              </a:defRPr>
+            </a:pPr>
+            <a:r>
+              <a:t>   0056         56,600  (+52.4%)  元大高股息</a:t>
+            </a:r>
+          </a:p>
+          <a:p>
+            <a:pPr>
+              <a:spcAft>
+                <a:spcPts val="500"/>
+              </a:spcAft>
+              <a:defRPr sz="1500">
+                <a:solidFill>
+                  <a:srgbClr val="FFFFFF"/>
+                </a:solidFill>
+              </a:defRPr>
+            </a:pPr>
+            <a:r>
+              <a:t>   00981A      245,200  (+16.4%)  主動統一台灣成長</a:t>
             </a:r>
           </a:p>
           <a:p>
@@ -4866,7 +4866,7 @@
               </a:defRPr>
             </a:pPr>
             <a:r>
-              <a:t>基金總市值 12,626,051 元（snapshot 9/4 報價日 9/3）</a:t>
+              <a:t>基金總市值 12,744,854 元（snapshot 9/4 報價日 9/3）</a:t>
             </a:r>
           </a:p>
         </p:txBody>
@@ -4919,37 +4919,37 @@
               </a:defRPr>
             </a:pPr>
             <a:r>
-              <a:t>     富達全球動能B月配美元 5,846,312 元 — 月配息主力</a:t>
-            </a:r>
-          </a:p>
-          <a:p>
-            <a:pPr>
-              <a:spcAft>
-                <a:spcPts val="500"/>
-              </a:spcAft>
-              <a:defRPr sz="1500">
-                <a:solidFill>
-                  <a:srgbClr val="FFFFFF"/>
-                </a:solidFill>
-              </a:defRPr>
-            </a:pPr>
-            <a:r>
-              <a:t>     貝萊德B11 強化穩定月配息 4,965,404 元（原 MMF 500 萬贖回款轉申購；⛔ 原「500萬標案預備金」已作廢 9/11）</a:t>
-            </a:r>
-          </a:p>
-          <a:p>
-            <a:pPr>
-              <a:spcAft>
-                <a:spcPts val="500"/>
-              </a:spcAft>
-              <a:defRPr sz="1500">
-                <a:solidFill>
-                  <a:srgbClr val="FFFFFF"/>
-                </a:solidFill>
-              </a:defRPr>
-            </a:pPr>
-            <a:r>
-              <a:t>     聯博全球多元收益AD美元月配 973,952 元</a:t>
+              <a:t>     富達全球動能B月配美元 5,915,586 元 — 月配息主力</a:t>
+            </a:r>
+          </a:p>
+          <a:p>
+            <a:pPr>
+              <a:spcAft>
+                <a:spcPts val="500"/>
+              </a:spcAft>
+              <a:defRPr sz="1500">
+                <a:solidFill>
+                  <a:srgbClr val="FFFFFF"/>
+                </a:solidFill>
+              </a:defRPr>
+            </a:pPr>
+            <a:r>
+              <a:t>     貝萊德B11 強化穩定月配息 4,982,474 元（原 MMF 500 萬贖回款轉申購；⛔ 原「500萬標案預備金」已作廢 9/11）</a:t>
+            </a:r>
+          </a:p>
+          <a:p>
+            <a:pPr>
+              <a:spcAft>
+                <a:spcPts val="500"/>
+              </a:spcAft>
+              <a:defRPr sz="1500">
+                <a:solidFill>
+                  <a:srgbClr val="FFFFFF"/>
+                </a:solidFill>
+              </a:defRPr>
+            </a:pPr>
+            <a:r>
+              <a:t>     聯博全球多元收益AD美元月配 978,064 元</a:t>
             </a:r>
           </a:p>
           <a:p>
@@ -5416,7 +5416,7 @@
               </a:defRPr>
             </a:pPr>
             <a:r>
-              <a:t>穿透：台股 7.7%｜美股 39.3%（科技15.2）｜防守配息 17.3%｜債券 28.7%｜現金 3.5%</a:t>
+              <a:t>穿透：台股 7.8%｜美股 39.4%（科技15.2）｜防守配息 17.3%｜債券 28.7%｜現金 3.4%</a:t>
             </a:r>
           </a:p>
         </p:txBody>
@@ -5484,7 +5484,7 @@
               </a:defRPr>
             </a:pPr>
             <a:r>
-              <a:t>     台股穿透 7.7% → 偏低，但觀望期凍結新增</a:t>
+              <a:t>     台股穿透 7.8% → 偏低，但觀望期凍結新增</a:t>
             </a:r>
           </a:p>
           <a:p>
@@ -5595,7 +5595,7 @@
               </a:defRPr>
             </a:pPr>
             <a:r>
-              <a:t>📊 現金/安全網穿透 3.5%：底線 70 萬已守住</a:t>
+              <a:t>📊 現金/安全網穿透 3.4%：底線 70 萬已守住</a:t>
             </a:r>
           </a:p>
           <a:p>
@@ -5744,7 +5744,7 @@
               </a:defRPr>
             </a:pPr>
             <a:r>
-              <a:t>🔴 情境A：升息（30yr 5.30% 警戒區，CPI 9/11 關鍵）</a:t>
+              <a:t>🔴 情境A：升息（30yr 5.50% 警戒區，CPI 9/11 關鍵）</a:t>
             </a:r>
           </a:p>
           <a:p>

--- a/grand_pivot_deck.pptx
+++ b/grand_pivot_deck.pptx
@@ -3171,7 +3171,7 @@
               </a:defRPr>
             </a:pPr>
             <a:r>
-              <a:t>USD/TWD 31.69  ×  台股 48,025（09/24 收盤）  ×  10yr 5.18%</a:t>
+              <a:t>USD/TWD 31.82  ×  台股 47,632（09/29 收盤）  ×  10yr 5.24%</a:t>
             </a:r>
           </a:p>
         </p:txBody>
@@ -3209,7 +3209,7 @@
               </a:defRPr>
             </a:pPr>
             <a:r>
-              <a:t>數據基準：09/24 最新收盤（執行時自動抓取）｜ 龍九控股策略框架 9/6 核准</a:t>
+              <a:t>數據基準：09/29 最新收盤（執行時自動抓取）｜ 龍九控股策略框架 9/6 核准</a:t>
             </a:r>
           </a:p>
           <a:p>
@@ -3370,22 +3370,22 @@
               </a:defRPr>
             </a:pPr>
             <a:r>
-              <a:t>1️⃣ 【您】整池 1,200萬×4.5成 = 540萬@2.77%質押（❌ 尚未撥款（2026-09-21 對保完成；預計 2026-09-29 撥款））</a:t>
-            </a:r>
-          </a:p>
-          <a:p>
-            <a:pPr>
-              <a:spcAft>
-                <a:spcPts val="500"/>
-              </a:spcAft>
-              <a:defRPr sz="1500">
-                <a:solidFill>
-                  <a:srgbClr val="FFFFFF"/>
-                </a:solidFill>
-              </a:defRPr>
-            </a:pPr>
-            <a:r>
-              <a:t>      還安聯 300 萬 → 保單借貸成本 4.2% 降至 2.77%</a:t>
+              <a:t>1️⃣ 【您】整池 1,200萬×5.0成 = 590萬@2.65%（2026-09-29 使用者確認；原記 2.77%，待銀行書面覆核）質押（已撥款）</a:t>
+            </a:r>
+          </a:p>
+          <a:p>
+            <a:pPr>
+              <a:spcAft>
+                <a:spcPts val="500"/>
+              </a:spcAft>
+              <a:defRPr sz="1500">
+                <a:solidFill>
+                  <a:srgbClr val="FFFFFF"/>
+                </a:solidFill>
+              </a:defRPr>
+            </a:pPr>
+            <a:r>
+              <a:t>      還保單借貸（4% → 質押 2.65%）：第一批 200 萬已提出申請、待入帳</a:t>
             </a:r>
           </a:p>
           <a:p>
@@ -3484,7 +3484,7 @@
               </a:defRPr>
             </a:pPr>
             <a:r>
-              <a:t>      升息確定 → ⛔ 原「500 萬 MMF 轉還債安全墊」已作廢（MMF 已轉 B11）；現行＝整池質押 540 萬@2.77% 清償 500 萬高息負債</a:t>
+              <a:t>      升息確定 → ⛔ 原「500 萬 MMF 轉還債安全墊」已作廢（MMF 已轉 B11）；現行＝質押 590 萬@2.65% 清償 500 萬高息負債（9/29 撥款入帳）</a:t>
             </a:r>
           </a:p>
           <a:p>
@@ -3744,88 +3744,88 @@
               </a:defRPr>
             </a:pPr>
             <a:r>
-              <a:t>💰 匯率 31.69：台幣偏強 → 不再加碼美元曝險，等 10 月重評估</a:t>
-            </a:r>
-          </a:p>
-          <a:p>
-            <a:pPr>
-              <a:spcAft>
-                <a:spcPts val="500"/>
-              </a:spcAft>
-              <a:defRPr sz="1500">
-                <a:solidFill>
-                  <a:srgbClr val="FFFFFF"/>
-                </a:solidFill>
-              </a:defRPr>
-            </a:pPr>
-          </a:p>
-          <a:p>
-            <a:pPr>
-              <a:spcAft>
-                <a:spcPts val="500"/>
-              </a:spcAft>
-              <a:defRPr sz="1500">
-                <a:solidFill>
-                  <a:srgbClr val="FFFFFF"/>
-                </a:solidFill>
-              </a:defRPr>
-            </a:pPr>
-            <a:r>
-              <a:t>🏠 債務 ~2.6%：比市場低 4pp+，整池質押 540 萬@2.77% 再降成本</a:t>
-            </a:r>
-          </a:p>
-          <a:p>
-            <a:pPr>
-              <a:spcAft>
-                <a:spcPts val="500"/>
-              </a:spcAft>
-              <a:defRPr sz="1500">
-                <a:solidFill>
-                  <a:srgbClr val="FFFFFF"/>
-                </a:solidFill>
-              </a:defRPr>
-            </a:pPr>
-          </a:p>
-          <a:p>
-            <a:pPr>
-              <a:spcAft>
-                <a:spcPts val="500"/>
-              </a:spcAft>
-              <a:defRPr sz="1500">
-                <a:solidFill>
-                  <a:srgbClr val="FFFFFF"/>
-                </a:solidFill>
-              </a:defRPr>
-            </a:pPr>
-            <a:r>
-              <a:t>📈 台股 48,025（09/24 收盤，單日 -0.28%）→ 無系統風險，不恐慌不追高</a:t>
-            </a:r>
-          </a:p>
-          <a:p>
-            <a:pPr>
-              <a:spcAft>
-                <a:spcPts val="500"/>
-              </a:spcAft>
-              <a:defRPr sz="1500">
-                <a:solidFill>
-                  <a:srgbClr val="FFFFFF"/>
-                </a:solidFill>
-              </a:defRPr>
-            </a:pPr>
-          </a:p>
-          <a:p>
-            <a:pPr>
-              <a:spcAft>
-                <a:spcPts val="500"/>
-              </a:spcAft>
-              <a:defRPr sz="1500">
-                <a:solidFill>
-                  <a:srgbClr val="FFFFFF"/>
-                </a:solidFill>
-              </a:defRPr>
-            </a:pPr>
-            <a:r>
-              <a:t>🎯 9/11／9/12 定案框架：整池質押 540 萬@2.77%（1,200 萬×4.5 成）→ 清償 500 萬高息負債；</a:t>
+              <a:t>💰 匯率 31.82：台幣偏強 → 不再加碼美元曝險，等 10 月重評估</a:t>
+            </a:r>
+          </a:p>
+          <a:p>
+            <a:pPr>
+              <a:spcAft>
+                <a:spcPts val="500"/>
+              </a:spcAft>
+              <a:defRPr sz="1500">
+                <a:solidFill>
+                  <a:srgbClr val="FFFFFF"/>
+                </a:solidFill>
+              </a:defRPr>
+            </a:pPr>
+          </a:p>
+          <a:p>
+            <a:pPr>
+              <a:spcAft>
+                <a:spcPts val="500"/>
+              </a:spcAft>
+              <a:defRPr sz="1500">
+                <a:solidFill>
+                  <a:srgbClr val="FFFFFF"/>
+                </a:solidFill>
+              </a:defRPr>
+            </a:pPr>
+            <a:r>
+              <a:t>🏠 債務 ~2.6%：比市場低 4pp+，質押 590 萬@2.65% 再降成本（9/29 已撥款）</a:t>
+            </a:r>
+          </a:p>
+          <a:p>
+            <a:pPr>
+              <a:spcAft>
+                <a:spcPts val="500"/>
+              </a:spcAft>
+              <a:defRPr sz="1500">
+                <a:solidFill>
+                  <a:srgbClr val="FFFFFF"/>
+                </a:solidFill>
+              </a:defRPr>
+            </a:pPr>
+          </a:p>
+          <a:p>
+            <a:pPr>
+              <a:spcAft>
+                <a:spcPts val="500"/>
+              </a:spcAft>
+              <a:defRPr sz="1500">
+                <a:solidFill>
+                  <a:srgbClr val="FFFFFF"/>
+                </a:solidFill>
+              </a:defRPr>
+            </a:pPr>
+            <a:r>
+              <a:t>📈 台股 47,632（09/29 收盤，單日 -0.82%）→ 無系統風險，不恐慌不追高</a:t>
+            </a:r>
+          </a:p>
+          <a:p>
+            <a:pPr>
+              <a:spcAft>
+                <a:spcPts val="500"/>
+              </a:spcAft>
+              <a:defRPr sz="1500">
+                <a:solidFill>
+                  <a:srgbClr val="FFFFFF"/>
+                </a:solidFill>
+              </a:defRPr>
+            </a:pPr>
+          </a:p>
+          <a:p>
+            <a:pPr>
+              <a:spcAft>
+                <a:spcPts val="500"/>
+              </a:spcAft>
+              <a:defRPr sz="1500">
+                <a:solidFill>
+                  <a:srgbClr val="FFFFFF"/>
+                </a:solidFill>
+              </a:defRPr>
+            </a:pPr>
+            <a:r>
+              <a:t>🎯 9/29 質押撥款 590 萬@2.65%（池市值 1,177.9 萬×約 5 成）→ 清償 500 萬高息負債（第一批 200 萬申請中）；</a:t>
             </a:r>
           </a:p>
           <a:p>
@@ -3943,7 +3943,7 @@
               </a:defRPr>
             </a:pPr>
             <a:r>
-              <a:t>即時市場：台股 48,025（-0.28%）</a:t>
+              <a:t>即時市場：台股 47,632（-0.82%）</a:t>
             </a:r>
           </a:p>
         </p:txBody>
@@ -3978,7 +3978,7 @@
               </a:defRPr>
             </a:pPr>
             <a:r>
-              <a:t>台股位處近一月高檔區 — 無系統性風險 ｜ 近一月低點 44,762</a:t>
+              <a:t>台股位處近一月高檔區 — 無系統性風險 ｜ 近一月低點 45,511</a:t>
             </a:r>
           </a:p>
         </p:txBody>
@@ -4016,7 +4016,7 @@
               </a:defRPr>
             </a:pPr>
             <a:r>
-              <a:t>📈 台股最新收盤 48,025（單日 -0.28%），asof 09/24</a:t>
+              <a:t>📈 台股最新收盤 47,632（單日 -0.82%），asof 09/29</a:t>
             </a:r>
           </a:p>
           <a:p>
@@ -4058,7 +4058,7 @@
               </a:defRPr>
             </a:pPr>
             <a:r>
-              <a:t>💵 USD/TWD 31.69 — 台幣偏強（較 7/29 高點 32.38 +2.1%）</a:t>
+              <a:t>💵 USD/TWD 31.82 — 台幣偏強（較 7/29 高點 32.38 +1.7%）</a:t>
             </a:r>
           </a:p>
           <a:p>
@@ -4100,7 +4100,7 @@
               </a:defRPr>
             </a:pPr>
             <a:r>
-              <a:t>📡 10yr 5.18% / 30yr 5.50% — 已達 5.30 凍結線，新增質押全域凍結</a:t>
+              <a:t>📡 10yr 5.24% / 30yr 5.56% — 已達 5.30 凍結線，新增質押全域凍結</a:t>
             </a:r>
           </a:p>
           <a:p>
@@ -4176,7 +4176,7 @@
               </a:defRPr>
             </a:pPr>
             <a:r>
-              <a:t>匯率 31.69 — 台幣偏強，美元曝險的雙面刃</a:t>
+              <a:t>匯率 31.82 — 台幣偏強，美元曝險的雙面刃</a:t>
             </a:r>
           </a:p>
         </p:txBody>
@@ -4264,7 +4264,7 @@
               </a:defRPr>
             </a:pPr>
             <a:r>
-              <a:t>     7/29 高點 32.38 → 如今 31.69（台幣偏強 +2.1%）</a:t>
+              <a:t>     7/29 高點 32.38 → 如今 31.82（台幣偏強 +1.7%）</a:t>
             </a:r>
           </a:p>
           <a:p>
@@ -4501,7 +4501,7 @@
               </a:defRPr>
             </a:pPr>
             <a:r>
-              <a:t>證券總市值 3,006,890 元（snapshot 9/4）— 台股 8/24 裁示暫緩、9/6 全面觀望</a:t>
+              <a:t>證券總市值 2,981,410 元（snapshot 9/4）— 台股 8/24 裁示暫緩、9/6 全面觀望</a:t>
             </a:r>
           </a:p>
         </p:txBody>
@@ -4566,112 +4566,112 @@
               </a:defRPr>
             </a:pPr>
             <a:r>
-              <a:t>   0050        224,900  (+32.5%)  元大台灣50</a:t>
-            </a:r>
-          </a:p>
-          <a:p>
-            <a:pPr>
-              <a:spcAft>
-                <a:spcPts val="500"/>
-              </a:spcAft>
-              <a:defRPr sz="1500">
-                <a:solidFill>
-                  <a:srgbClr val="FFFFFF"/>
-                </a:solidFill>
-              </a:defRPr>
-            </a:pPr>
-            <a:r>
-              <a:t>   006208      514,000  (+30.5%)  富邦台50</a:t>
-            </a:r>
-          </a:p>
-          <a:p>
-            <a:pPr>
-              <a:spcAft>
-                <a:spcPts val="500"/>
-              </a:spcAft>
-              <a:defRPr sz="1500">
-                <a:solidFill>
-                  <a:srgbClr val="FFFFFF"/>
-                </a:solidFill>
-              </a:defRPr>
-            </a:pPr>
-            <a:r>
-              <a:t>   009816      265,600  (+32.9%)  凱基台灣TOP50</a:t>
-            </a:r>
-          </a:p>
-          <a:p>
-            <a:pPr>
-              <a:spcAft>
-                <a:spcPts val="500"/>
-              </a:spcAft>
-              <a:defRPr sz="1500">
-                <a:solidFill>
-                  <a:srgbClr val="FFFFFF"/>
-                </a:solidFill>
-              </a:defRPr>
-            </a:pPr>
-            <a:r>
-              <a:t>   00646        77,600  (+8.4%)  元大S&amp;P500</a:t>
-            </a:r>
-          </a:p>
-          <a:p>
-            <a:pPr>
-              <a:spcAft>
-                <a:spcPts val="500"/>
-              </a:spcAft>
-              <a:defRPr sz="1500">
-                <a:solidFill>
-                  <a:srgbClr val="FFFFFF"/>
-                </a:solidFill>
-              </a:defRPr>
-            </a:pPr>
-            <a:r>
-              <a:t>   00713       127,300  (+16.1%)  元大台灣高息低波</a:t>
-            </a:r>
-          </a:p>
-          <a:p>
-            <a:pPr>
-              <a:spcAft>
-                <a:spcPts val="500"/>
-              </a:spcAft>
-              <a:defRPr sz="1500">
-                <a:solidFill>
-                  <a:srgbClr val="FFFFFF"/>
-                </a:solidFill>
-              </a:defRPr>
-            </a:pPr>
-            <a:r>
-              <a:t>   00878       526,350  (+29.1%)  國泰永續高股息</a:t>
-            </a:r>
-          </a:p>
-          <a:p>
-            <a:pPr>
-              <a:spcAft>
-                <a:spcPts val="500"/>
-              </a:spcAft>
-              <a:defRPr sz="1500">
-                <a:solidFill>
-                  <a:srgbClr val="FFFFFF"/>
-                </a:solidFill>
-              </a:defRPr>
-            </a:pPr>
-            <a:r>
-              <a:t>   0056         56,600  (+52.4%)  元大高股息</a:t>
-            </a:r>
-          </a:p>
-          <a:p>
-            <a:pPr>
-              <a:spcAft>
-                <a:spcPts val="500"/>
-              </a:spcAft>
-              <a:defRPr sz="1500">
-                <a:solidFill>
-                  <a:srgbClr val="FFFFFF"/>
-                </a:solidFill>
-              </a:defRPr>
-            </a:pPr>
-            <a:r>
-              <a:t>   00981A      245,200  (+16.4%)  主動統一台灣成長</a:t>
+              <a:t>   0050        222,600  (+31.1%)  元大台灣50</a:t>
+            </a:r>
+          </a:p>
+          <a:p>
+            <a:pPr>
+              <a:spcAft>
+                <a:spcPts val="500"/>
+              </a:spcAft>
+              <a:defRPr sz="1500">
+                <a:solidFill>
+                  <a:srgbClr val="FFFFFF"/>
+                </a:solidFill>
+              </a:defRPr>
+            </a:pPr>
+            <a:r>
+              <a:t>   006208      510,400  (+29.6%)  富邦台50</a:t>
+            </a:r>
+          </a:p>
+          <a:p>
+            <a:pPr>
+              <a:spcAft>
+                <a:spcPts val="500"/>
+              </a:spcAft>
+              <a:defRPr sz="1500">
+                <a:solidFill>
+                  <a:srgbClr val="FFFFFF"/>
+                </a:solidFill>
+              </a:defRPr>
+            </a:pPr>
+            <a:r>
+              <a:t>   009816      262,400  (+31.3%)  凱基台灣TOP50</a:t>
+            </a:r>
+          </a:p>
+          <a:p>
+            <a:pPr>
+              <a:spcAft>
+                <a:spcPts val="500"/>
+              </a:spcAft>
+              <a:defRPr sz="1500">
+                <a:solidFill>
+                  <a:srgbClr val="FFFFFF"/>
+                </a:solidFill>
+              </a:defRPr>
+            </a:pPr>
+            <a:r>
+              <a:t>   00646        76,900  (+7.4%)  元大S&amp;P500</a:t>
+            </a:r>
+          </a:p>
+          <a:p>
+            <a:pPr>
+              <a:spcAft>
+                <a:spcPts val="500"/>
+              </a:spcAft>
+              <a:defRPr sz="1500">
+                <a:solidFill>
+                  <a:srgbClr val="FFFFFF"/>
+                </a:solidFill>
+              </a:defRPr>
+            </a:pPr>
+            <a:r>
+              <a:t>   00713       125,800  (+14.8%)  元大台灣高息低波</a:t>
+            </a:r>
+          </a:p>
+          <a:p>
+            <a:pPr>
+              <a:spcAft>
+                <a:spcPts val="500"/>
+              </a:spcAft>
+              <a:defRPr sz="1500">
+                <a:solidFill>
+                  <a:srgbClr val="FFFFFF"/>
+                </a:solidFill>
+              </a:defRPr>
+            </a:pPr>
+            <a:r>
+              <a:t>   00878       522,450  (+28.2%)  國泰永續高股息</a:t>
+            </a:r>
+          </a:p>
+          <a:p>
+            <a:pPr>
+              <a:spcAft>
+                <a:spcPts val="500"/>
+              </a:spcAft>
+              <a:defRPr sz="1500">
+                <a:solidFill>
+                  <a:srgbClr val="FFFFFF"/>
+                </a:solidFill>
+              </a:defRPr>
+            </a:pPr>
+            <a:r>
+              <a:t>   0056         56,550  (+52.2%)  元大高股息</a:t>
+            </a:r>
+          </a:p>
+          <a:p>
+            <a:pPr>
+              <a:spcAft>
+                <a:spcPts val="500"/>
+              </a:spcAft>
+              <a:defRPr sz="1500">
+                <a:solidFill>
+                  <a:srgbClr val="FFFFFF"/>
+                </a:solidFill>
+              </a:defRPr>
+            </a:pPr>
+            <a:r>
+              <a:t>   00981A      242,480  (+15.2%)  主動統一台灣增長</a:t>
             </a:r>
           </a:p>
           <a:p>
@@ -4866,7 +4866,7 @@
               </a:defRPr>
             </a:pPr>
             <a:r>
-              <a:t>基金總市值 12,744,854 元（snapshot 9/4 報價日 9/3）</a:t>
+              <a:t>基金總市值 12,654,144 元（snapshot 9/4 報價日 9/3）</a:t>
             </a:r>
           </a:p>
         </p:txBody>
@@ -4919,37 +4919,37 @@
               </a:defRPr>
             </a:pPr>
             <a:r>
-              <a:t>     富達全球動能B月配美元 5,915,586 元 — 月配息主力</a:t>
-            </a:r>
-          </a:p>
-          <a:p>
-            <a:pPr>
-              <a:spcAft>
-                <a:spcPts val="500"/>
-              </a:spcAft>
-              <a:defRPr sz="1500">
-                <a:solidFill>
-                  <a:srgbClr val="FFFFFF"/>
-                </a:solidFill>
-              </a:defRPr>
-            </a:pPr>
-            <a:r>
-              <a:t>     貝萊德B11 強化穩定月配息 4,982,474 元（原 MMF 500 萬贖回款轉申購；⛔ 原「500萬標案預備金」已作廢 9/11）</a:t>
-            </a:r>
-          </a:p>
-          <a:p>
-            <a:pPr>
-              <a:spcAft>
-                <a:spcPts val="500"/>
-              </a:spcAft>
-              <a:defRPr sz="1500">
-                <a:solidFill>
-                  <a:srgbClr val="FFFFFF"/>
-                </a:solidFill>
-              </a:defRPr>
-            </a:pPr>
-            <a:r>
-              <a:t>     聯博全球多元收益AD美元月配 978,064 元</a:t>
+              <a:t>     富達全球動能B月配美元 5,863,138 元 — 月配息主力</a:t>
+            </a:r>
+          </a:p>
+          <a:p>
+            <a:pPr>
+              <a:spcAft>
+                <a:spcPts val="500"/>
+              </a:spcAft>
+              <a:defRPr sz="1500">
+                <a:solidFill>
+                  <a:srgbClr val="FFFFFF"/>
+                </a:solidFill>
+              </a:defRPr>
+            </a:pPr>
+            <a:r>
+              <a:t>     貝萊德B11 強化穩定月配息 4,947,299 元（原 MMF 500 萬贖回款轉申購；⛔ 原「500萬標案預備金」已作廢 9/11）</a:t>
+            </a:r>
+          </a:p>
+          <a:p>
+            <a:pPr>
+              <a:spcAft>
+                <a:spcPts val="500"/>
+              </a:spcAft>
+              <a:defRPr sz="1500">
+                <a:solidFill>
+                  <a:srgbClr val="FFFFFF"/>
+                </a:solidFill>
+              </a:defRPr>
+            </a:pPr>
+            <a:r>
+              <a:t>     聯博全球多元收益AD美元月配 968,889 元</a:t>
             </a:r>
           </a:p>
           <a:p>
@@ -5167,22 +5167,22 @@
               </a:defRPr>
             </a:pPr>
             <a:r>
-              <a:t>🔴 保單借貸 400 萬 @4%+ → 整池質押後 540 萬@2.77% 償還</a:t>
-            </a:r>
-          </a:p>
-          <a:p>
-            <a:pPr>
-              <a:spcAft>
-                <a:spcPts val="500"/>
-              </a:spcAft>
-              <a:defRPr sz="1500">
-                <a:solidFill>
-                  <a:srgbClr val="FFFFFF"/>
-                </a:solidFill>
-              </a:defRPr>
-            </a:pPr>
-            <a:r>
-              <a:t>     （還安聯 300 萬；餘 240 萬標案押標金），利息成本 4.2% → 2.77%</a:t>
+              <a:t>🔴 保單借貸 400 萬 @4%+ → 質押 590 萬@2.65% 償還（9/29 已撥款入帳）</a:t>
+            </a:r>
+          </a:p>
+          <a:p>
+            <a:pPr>
+              <a:spcAft>
+                <a:spcPts val="500"/>
+              </a:spcAft>
+              <a:defRPr sz="1500">
+                <a:solidFill>
+                  <a:srgbClr val="FFFFFF"/>
+                </a:solidFill>
+              </a:defRPr>
+            </a:pPr>
+            <a:r>
+              <a:t>     （第一批 200 萬已提出還款申請、待入帳；餘 300 萬待執行）利息成本 4% → 2.65%</a:t>
             </a:r>
           </a:p>
           <a:p>
@@ -5416,7 +5416,7 @@
               </a:defRPr>
             </a:pPr>
             <a:r>
-              <a:t>穿透：台股 7.8%｜美股 39.4%（科技15.2）｜防守配息 17.3%｜債券 28.7%｜現金 3.4%</a:t>
+              <a:t>穿透：台股 6.4%｜美股 32.2%（科技12.4）｜防守配息 14.1%｜債券 23.4%｜現金 21.1%</a:t>
             </a:r>
           </a:p>
         </p:txBody>
@@ -5484,7 +5484,7 @@
               </a:defRPr>
             </a:pPr>
             <a:r>
-              <a:t>     台股穿透 7.8% → 偏低，但觀望期凍結新增</a:t>
+              <a:t>     台股穿透 6.4% → 偏低，但觀望期凍結新增</a:t>
             </a:r>
           </a:p>
           <a:p>
@@ -5553,7 +5553,7 @@
               </a:defRPr>
             </a:pPr>
             <a:r>
-              <a:t>     升息確定 → ⛔ 原「500 萬 MMF 轉還債安全墊」已作廢（MMF 已轉 B11）→ 改由整池質押 540 萬（~9/25 撥款）清償高息負債</a:t>
+              <a:t>     升息確定 → ⛔ 原「500 萬 MMF 轉還債安全墊」已作廢（MMF 已轉 B11）→ 改由質押 590 萬（9/29 已撥款入帳）清償高息負債</a:t>
             </a:r>
           </a:p>
           <a:p>
@@ -5595,7 +5595,7 @@
               </a:defRPr>
             </a:pPr>
             <a:r>
-              <a:t>📊 現金/安全網穿透 3.4%：底線 70 萬已守住</a:t>
+              <a:t>📊 現金/安全網穿透 21.1%：底線 70 萬已守住</a:t>
             </a:r>
           </a:p>
           <a:p>
@@ -5744,7 +5744,7 @@
               </a:defRPr>
             </a:pPr>
             <a:r>
-              <a:t>🔴 情境A：升息（30yr 5.50% 警戒區，CPI 9/11 關鍵）</a:t>
+              <a:t>🔴 情境A：升息（30yr 5.56% 警戒區，CPI 9/11 關鍵）</a:t>
             </a:r>
           </a:p>
           <a:p>
@@ -6019,7 +6019,7 @@
               </a:defRPr>
             </a:pPr>
             <a:r>
-              <a:t>📅 質押：🔍 質押：擔保池 1,200萬（富達600＋聯博100＋貝萊德B11 500）×4.5成 = 540萬@2.77%；❌ 尚未撥款（2026-09-21 對保完成；預計 2026-09-29 撥款） → 用途：優先清償 500萬高息負債（保單質押 400萬@4.0% ＋ 券商質押 100萬@3.92%）— 月息 16,600 → 12,465，月省約 4,135（2026-09-12 裁示；10月標案押標金不預留，9月底評估）</a:t>
+              <a:t>📅 質押：🔍 質押：擔保池 1,200萬（富達600＋聯博100＋貝萊德B11 500）×5.0成 = 590萬@2.65%（2026-09-29 使用者確認；原記 2.77%，待銀行書面覆核）；已撥款 → 用途：優先清償 500萬高息負債（保單質押 400萬@4.0% ＋ 券商質押 100萬@3.92%）— 月息 16,600 → 0，月省約 16,600（2026-09-12 裁示；10月標案押標金不預留，9月底評估）</a:t>
             </a:r>
           </a:p>
           <a:p>
@@ -6061,7 +6061,7 @@
               </a:defRPr>
             </a:pPr>
             <a:r>
-              <a:t>     升息確定 → ⛔ 原「500 萬 MMF 轉還債安全墊（不換匯不買債）」已作廢；現行＝整池質押 540 萬@2.77% 清償 500 萬高息負債</a:t>
+              <a:t>     升息確定 → ⛔ 原「500 萬 MMF 轉還債安全墊（不換匯不買債）」已作廢；現行＝質押 590 萬@2.65% 清償 500 萬高息負債（9/29 撥款入帳）</a:t>
             </a:r>
           </a:p>
           <a:p>

--- a/grand_pivot_deck.pptx
+++ b/grand_pivot_deck.pptx
@@ -3171,7 +3171,7 @@
               </a:defRPr>
             </a:pPr>
             <a:r>
-              <a:t>USD/TWD 31.82  ×  台股 47,632（09/29 收盤）  ×  10yr 5.24%</a:t>
+              <a:t>USD/TWD 31.92  ×  台股 48,353（10/01 收盤）  ×  10yr 5.32%</a:t>
             </a:r>
           </a:p>
         </p:txBody>
@@ -3209,7 +3209,7 @@
               </a:defRPr>
             </a:pPr>
             <a:r>
-              <a:t>數據基準：09/29 最新收盤（執行時自動抓取）｜ 龍九控股策略框架 9/6 核准</a:t>
+              <a:t>數據基準：10/01 最新收盤（執行時自動抓取）｜ 龍九控股策略框架 9/6 核准</a:t>
             </a:r>
           </a:p>
           <a:p>
@@ -3744,7 +3744,7 @@
               </a:defRPr>
             </a:pPr>
             <a:r>
-              <a:t>💰 匯率 31.82：台幣偏強 → 不再加碼美元曝險，等 10 月重評估</a:t>
+              <a:t>💰 匯率 31.92：台幣偏強 → 不再加碼美元曝險，等 10 月重評估</a:t>
             </a:r>
           </a:p>
           <a:p>
@@ -3798,7 +3798,7 @@
               </a:defRPr>
             </a:pPr>
             <a:r>
-              <a:t>📈 台股 47,632（09/29 收盤，單日 -0.82%）→ 無系統風險，不恐慌不追高</a:t>
+              <a:t>📈 台股 48,353（10/01 收盤，單日 +0.86%）→ 無系統風險，不恐慌不追高</a:t>
             </a:r>
           </a:p>
           <a:p>
@@ -3943,7 +3943,7 @@
               </a:defRPr>
             </a:pPr>
             <a:r>
-              <a:t>即時市場：台股 47,632（-0.82%）</a:t>
+              <a:t>即時市場：台股 48,353（+0.86%）</a:t>
             </a:r>
           </a:p>
         </p:txBody>
@@ -4016,7 +4016,7 @@
               </a:defRPr>
             </a:pPr>
             <a:r>
-              <a:t>📈 台股最新收盤 47,632（單日 -0.82%），asof 09/29</a:t>
+              <a:t>📈 台股最新收盤 48,353（單日 +0.86%），asof 10/01</a:t>
             </a:r>
           </a:p>
           <a:p>
@@ -4058,7 +4058,7 @@
               </a:defRPr>
             </a:pPr>
             <a:r>
-              <a:t>💵 USD/TWD 31.82 — 台幣偏強（較 7/29 高點 32.38 +1.7%）</a:t>
+              <a:t>💵 USD/TWD 31.92 — 台幣偏強（較 7/29 高點 32.38 +1.4%）</a:t>
             </a:r>
           </a:p>
           <a:p>
@@ -4100,7 +4100,7 @@
               </a:defRPr>
             </a:pPr>
             <a:r>
-              <a:t>📡 10yr 5.24% / 30yr 5.56% — 已達 5.30 凍結線，新增質押全域凍結</a:t>
+              <a:t>📡 10yr 5.32% / 30yr 5.67% — 已達 5.30 凍結線，新增質押全域凍結</a:t>
             </a:r>
           </a:p>
           <a:p>
@@ -4176,7 +4176,7 @@
               </a:defRPr>
             </a:pPr>
             <a:r>
-              <a:t>匯率 31.82 — 台幣偏強，美元曝險的雙面刃</a:t>
+              <a:t>匯率 31.92 — 台幣偏強，美元曝險的雙面刃</a:t>
             </a:r>
           </a:p>
         </p:txBody>
@@ -4264,7 +4264,7 @@
               </a:defRPr>
             </a:pPr>
             <a:r>
-              <a:t>     7/29 高點 32.38 → 如今 31.82（台幣偏強 +1.7%）</a:t>
+              <a:t>     7/29 高點 32.38 → 如今 31.92（台幣偏強 +1.4%）</a:t>
             </a:r>
           </a:p>
           <a:p>
@@ -4501,7 +4501,7 @@
               </a:defRPr>
             </a:pPr>
             <a:r>
-              <a:t>證券總市值 2,981,410 元（snapshot 9/4）— 台股 8/24 裁示暫緩、9/6 全面觀望</a:t>
+              <a:t>證券總市值 3,007,220 元（snapshot 9/4）— 台股 8/24 裁示暫緩、9/6 全面觀望</a:t>
             </a:r>
           </a:p>
         </p:txBody>
@@ -4566,112 +4566,112 @@
               </a:defRPr>
             </a:pPr>
             <a:r>
-              <a:t>   0050        222,600  (+31.1%)  元大台灣50</a:t>
-            </a:r>
-          </a:p>
-          <a:p>
-            <a:pPr>
-              <a:spcAft>
-                <a:spcPts val="500"/>
-              </a:spcAft>
-              <a:defRPr sz="1500">
-                <a:solidFill>
-                  <a:srgbClr val="FFFFFF"/>
-                </a:solidFill>
-              </a:defRPr>
-            </a:pPr>
-            <a:r>
-              <a:t>   006208      510,400  (+29.6%)  富邦台50</a:t>
-            </a:r>
-          </a:p>
-          <a:p>
-            <a:pPr>
-              <a:spcAft>
-                <a:spcPts val="500"/>
-              </a:spcAft>
-              <a:defRPr sz="1500">
-                <a:solidFill>
-                  <a:srgbClr val="FFFFFF"/>
-                </a:solidFill>
-              </a:defRPr>
-            </a:pPr>
-            <a:r>
-              <a:t>   009816      262,400  (+31.3%)  凱基台灣TOP50</a:t>
-            </a:r>
-          </a:p>
-          <a:p>
-            <a:pPr>
-              <a:spcAft>
-                <a:spcPts val="500"/>
-              </a:spcAft>
-              <a:defRPr sz="1500">
-                <a:solidFill>
-                  <a:srgbClr val="FFFFFF"/>
-                </a:solidFill>
-              </a:defRPr>
-            </a:pPr>
-            <a:r>
-              <a:t>   00646        76,900  (+7.4%)  元大S&amp;P500</a:t>
-            </a:r>
-          </a:p>
-          <a:p>
-            <a:pPr>
-              <a:spcAft>
-                <a:spcPts val="500"/>
-              </a:spcAft>
-              <a:defRPr sz="1500">
-                <a:solidFill>
-                  <a:srgbClr val="FFFFFF"/>
-                </a:solidFill>
-              </a:defRPr>
-            </a:pPr>
-            <a:r>
-              <a:t>   00713       125,800  (+14.8%)  元大台灣高息低波</a:t>
-            </a:r>
-          </a:p>
-          <a:p>
-            <a:pPr>
-              <a:spcAft>
-                <a:spcPts val="500"/>
-              </a:spcAft>
-              <a:defRPr sz="1500">
-                <a:solidFill>
-                  <a:srgbClr val="FFFFFF"/>
-                </a:solidFill>
-              </a:defRPr>
-            </a:pPr>
-            <a:r>
-              <a:t>   00878       522,450  (+28.2%)  國泰永續高股息</a:t>
-            </a:r>
-          </a:p>
-          <a:p>
-            <a:pPr>
-              <a:spcAft>
-                <a:spcPts val="500"/>
-              </a:spcAft>
-              <a:defRPr sz="1500">
-                <a:solidFill>
-                  <a:srgbClr val="FFFFFF"/>
-                </a:solidFill>
-              </a:defRPr>
-            </a:pPr>
-            <a:r>
-              <a:t>   0056         56,550  (+52.2%)  元大高股息</a:t>
-            </a:r>
-          </a:p>
-          <a:p>
-            <a:pPr>
-              <a:spcAft>
-                <a:spcPts val="500"/>
-              </a:spcAft>
-              <a:defRPr sz="1500">
-                <a:solidFill>
-                  <a:srgbClr val="FFFFFF"/>
-                </a:solidFill>
-              </a:defRPr>
-            </a:pPr>
-            <a:r>
-              <a:t>   00981A      242,480  (+15.2%)  主動統一台灣增長</a:t>
+              <a:t>   0050        225,800  (+33.0%)  元大台灣50</a:t>
+            </a:r>
+          </a:p>
+          <a:p>
+            <a:pPr>
+              <a:spcAft>
+                <a:spcPts val="500"/>
+              </a:spcAft>
+              <a:defRPr sz="1500">
+                <a:solidFill>
+                  <a:srgbClr val="FFFFFF"/>
+                </a:solidFill>
+              </a:defRPr>
+            </a:pPr>
+            <a:r>
+              <a:t>   006208      516,500  (+31.2%)  富邦台50</a:t>
+            </a:r>
+          </a:p>
+          <a:p>
+            <a:pPr>
+              <a:spcAft>
+                <a:spcPts val="500"/>
+              </a:spcAft>
+              <a:defRPr sz="1500">
+                <a:solidFill>
+                  <a:srgbClr val="FFFFFF"/>
+                </a:solidFill>
+              </a:defRPr>
+            </a:pPr>
+            <a:r>
+              <a:t>   009816      265,600  (+32.9%)  凱基台灣TOP50</a:t>
+            </a:r>
+          </a:p>
+          <a:p>
+            <a:pPr>
+              <a:spcAft>
+                <a:spcPts val="500"/>
+              </a:spcAft>
+              <a:defRPr sz="1500">
+                <a:solidFill>
+                  <a:srgbClr val="FFFFFF"/>
+                </a:solidFill>
+              </a:defRPr>
+            </a:pPr>
+            <a:r>
+              <a:t>   00646        77,500  (+8.2%)  元大S&amp;P500</a:t>
+            </a:r>
+          </a:p>
+          <a:p>
+            <a:pPr>
+              <a:spcAft>
+                <a:spcPts val="500"/>
+              </a:spcAft>
+              <a:defRPr sz="1500">
+                <a:solidFill>
+                  <a:srgbClr val="FFFFFF"/>
+                </a:solidFill>
+              </a:defRPr>
+            </a:pPr>
+            <a:r>
+              <a:t>   00713       125,700  (+14.7%)  元大台灣高息低波</a:t>
+            </a:r>
+          </a:p>
+          <a:p>
+            <a:pPr>
+              <a:spcAft>
+                <a:spcPts val="500"/>
+              </a:spcAft>
+              <a:defRPr sz="1500">
+                <a:solidFill>
+                  <a:srgbClr val="FFFFFF"/>
+                </a:solidFill>
+              </a:defRPr>
+            </a:pPr>
+            <a:r>
+              <a:t>   00878       523,350  (+28.4%)  國泰永續高股息</a:t>
+            </a:r>
+          </a:p>
+          <a:p>
+            <a:pPr>
+              <a:spcAft>
+                <a:spcPts val="500"/>
+              </a:spcAft>
+              <a:defRPr sz="1500">
+                <a:solidFill>
+                  <a:srgbClr val="FFFFFF"/>
+                </a:solidFill>
+              </a:defRPr>
+            </a:pPr>
+            <a:r>
+              <a:t>   0056         56,850  (+53.0%)  元大高股息</a:t>
+            </a:r>
+          </a:p>
+          <a:p>
+            <a:pPr>
+              <a:spcAft>
+                <a:spcPts val="500"/>
+              </a:spcAft>
+              <a:defRPr sz="1500">
+                <a:solidFill>
+                  <a:srgbClr val="FFFFFF"/>
+                </a:solidFill>
+              </a:defRPr>
+            </a:pPr>
+            <a:r>
+              <a:t>   00981A      248,000  (+17.8%)  主動統一台灣增長</a:t>
             </a:r>
           </a:p>
           <a:p>
@@ -4866,7 +4866,7 @@
               </a:defRPr>
             </a:pPr>
             <a:r>
-              <a:t>基金總市值 12,654,144 元（snapshot 9/4 報價日 9/3）</a:t>
+              <a:t>基金總市值 12,611,674 元（snapshot 9/4 報價日 9/3）</a:t>
             </a:r>
           </a:p>
         </p:txBody>
@@ -4919,37 +4919,37 @@
               </a:defRPr>
             </a:pPr>
             <a:r>
-              <a:t>     富達全球動能B月配美元 5,863,138 元 — 月配息主力</a:t>
-            </a:r>
-          </a:p>
-          <a:p>
-            <a:pPr>
-              <a:spcAft>
-                <a:spcPts val="500"/>
-              </a:spcAft>
-              <a:defRPr sz="1500">
-                <a:solidFill>
-                  <a:srgbClr val="FFFFFF"/>
-                </a:solidFill>
-              </a:defRPr>
-            </a:pPr>
-            <a:r>
-              <a:t>     貝萊德B11 強化穩定月配息 4,947,299 元（原 MMF 500 萬贖回款轉申購；⛔ 原「500萬標案預備金」已作廢 9/11）</a:t>
-            </a:r>
-          </a:p>
-          <a:p>
-            <a:pPr>
-              <a:spcAft>
-                <a:spcPts val="500"/>
-              </a:spcAft>
-              <a:defRPr sz="1500">
-                <a:solidFill>
-                  <a:srgbClr val="FFFFFF"/>
-                </a:solidFill>
-              </a:defRPr>
-            </a:pPr>
-            <a:r>
-              <a:t>     聯博全球多元收益AD美元月配 968,889 元</a:t>
+              <a:t>     富達全球動能B月配美元 5,881,827 元 — 月配息主力</a:t>
+            </a:r>
+          </a:p>
+          <a:p>
+            <a:pPr>
+              <a:spcAft>
+                <a:spcPts val="500"/>
+              </a:spcAft>
+              <a:defRPr sz="1500">
+                <a:solidFill>
+                  <a:srgbClr val="FFFFFF"/>
+                </a:solidFill>
+              </a:defRPr>
+            </a:pPr>
+            <a:r>
+              <a:t>     貝萊德B11 強化穩定月配息 4,896,288 元（原 MMF 500 萬贖回款轉申購；⛔ 原「500萬標案預備金」已作廢 9/11）</a:t>
+            </a:r>
+          </a:p>
+          <a:p>
+            <a:pPr>
+              <a:spcAft>
+                <a:spcPts val="500"/>
+              </a:spcAft>
+              <a:defRPr sz="1500">
+                <a:solidFill>
+                  <a:srgbClr val="FFFFFF"/>
+                </a:solidFill>
+              </a:defRPr>
+            </a:pPr>
+            <a:r>
+              <a:t>     聯博全球多元收益AD美元月配 959,826 元</a:t>
             </a:r>
           </a:p>
           <a:p>
@@ -5167,7 +5167,7 @@
               </a:defRPr>
             </a:pPr>
             <a:r>
-              <a:t>🔴 保單借貸 400 萬 @4%+ → 質押 590 萬@2.65% 償還（9/29 已撥款入帳）</a:t>
+              <a:t>🔴 保單借貸 0 萬 @4%+ → 質押 590 萬@2.65% 償還（9/29 已撥款入帳）</a:t>
             </a:r>
           </a:p>
           <a:p>
@@ -5305,7 +5305,7 @@
               </a:defRPr>
             </a:pPr>
             <a:r>
-              <a:t>🏠 優勢：別人貸款 6-7%，您 2.5-2.6% → 升息環境反而擴大利差優勢</a:t>
+              <a:t>🏠 優勢：別人貸款 6-7%，您 2.6% → 升息環境反而擴大利差優勢</a:t>
             </a:r>
           </a:p>
           <a:p>
@@ -5416,7 +5416,7 @@
               </a:defRPr>
             </a:pPr>
             <a:r>
-              <a:t>穿透：台股 6.4%｜美股 32.2%（科技12.4）｜防守配息 14.1%｜債券 23.4%｜現金 21.1%</a:t>
+              <a:t>穿透：台股 7.6%｜美股 38.3%（科技15.1）｜防守配息 16.7%｜債券 27.6%｜現金 3.2%</a:t>
             </a:r>
           </a:p>
         </p:txBody>
@@ -5484,7 +5484,7 @@
               </a:defRPr>
             </a:pPr>
             <a:r>
-              <a:t>     台股穿透 6.4% → 偏低，但觀望期凍結新增</a:t>
+              <a:t>     台股穿透 7.6% → 偏低，但觀望期凍結新增</a:t>
             </a:r>
           </a:p>
           <a:p>
@@ -5595,7 +5595,7 @@
               </a:defRPr>
             </a:pPr>
             <a:r>
-              <a:t>📊 現金/安全網穿透 21.1%：底線 70 萬已守住</a:t>
+              <a:t>📊 現金/安全網穿透 3.2%：底線 70 萬已守住</a:t>
             </a:r>
           </a:p>
           <a:p>
@@ -5744,7 +5744,7 @@
               </a:defRPr>
             </a:pPr>
             <a:r>
-              <a:t>🔴 情境A：升息（30yr 5.56% 警戒區，CPI 9/11 關鍵）</a:t>
+              <a:t>🔴 情境A：升息（30yr 5.67% 警戒區，CPI 9/11 關鍵）</a:t>
             </a:r>
           </a:p>
           <a:p>
@@ -6019,7 +6019,7 @@
               </a:defRPr>
             </a:pPr>
             <a:r>
-              <a:t>📅 質押：🔍 質押：擔保池 1,200萬（富達600＋聯博100＋貝萊德B11 500）×5.0成 = 590萬@2.65%（2026-09-29 使用者確認；原記 2.77%，待銀行書面覆核）；已撥款 → 用途：優先清償 500萬高息負債（保單質押 400萬@4.0% ＋ 券商質押 100萬@3.92%）— 月息 16,600 → 0，月省約 16,600（2026-09-12 裁示；10月標案押標金不預留，9月底評估）</a:t>
+              <a:t>📅 質押：🔍 質押：擔保池 1,200萬（富達600＋聯博100＋貝萊德B11 500）×5.0成 = 590萬@2.65%（2026-09-29 使用者確認；原記 2.77%，待銀行書面覆核）；已撥款 → 用途：優先清償 0萬高息負債（保單質押 0萬@4.0% ＋ 券商質押 0萬@3.92%）— 月息 0 → 0，月省約 0（2026-09-12 裁示；10月標案押標金不預留，9月底評估）</a:t>
             </a:r>
           </a:p>
           <a:p>

--- a/grand_pivot_deck.pptx
+++ b/grand_pivot_deck.pptx
@@ -3171,7 +3171,7 @@
               </a:defRPr>
             </a:pPr>
             <a:r>
-              <a:t>USD/TWD 31.92  ×  台股 48,353（10/01 收盤）  ×  10yr 5.32%</a:t>
+              <a:t>USD/TWD 31.80  ×  台股 48,476（10/02 收盤）  ×  10yr 5.28%</a:t>
             </a:r>
           </a:p>
         </p:txBody>
@@ -3209,7 +3209,7 @@
               </a:defRPr>
             </a:pPr>
             <a:r>
-              <a:t>數據基準：10/01 最新收盤（執行時自動抓取）｜ 龍九控股策略框架 9/6 核准</a:t>
+              <a:t>數據基準：10/02 最新收盤（執行時自動抓取）｜ 龍九控股策略框架 9/6 核准</a:t>
             </a:r>
           </a:p>
           <a:p>
@@ -3370,7 +3370,7 @@
               </a:defRPr>
             </a:pPr>
             <a:r>
-              <a:t>1️⃣ 【您】整池 1,200萬×5.0成 = 590萬@2.65%（2026-09-29 使用者確認；原記 2.77%，待銀行書面覆核）質押（已撥款）</a:t>
+              <a:t>1️⃣ 【您】整池 1,200萬×5成 = 590萬@2.65%（2026-09-29 使用者確認；原記 2.77%，待銀行書面覆核）質押（已撥款）</a:t>
             </a:r>
           </a:p>
           <a:p>
@@ -3744,7 +3744,7 @@
               </a:defRPr>
             </a:pPr>
             <a:r>
-              <a:t>💰 匯率 31.92：台幣偏強 → 不再加碼美元曝險，等 10 月重評估</a:t>
+              <a:t>💰 匯率 31.80：台幣偏強 → 不再加碼美元曝險，等 10 月重評估</a:t>
             </a:r>
           </a:p>
           <a:p>
@@ -3798,7 +3798,7 @@
               </a:defRPr>
             </a:pPr>
             <a:r>
-              <a:t>📈 台股 48,353（10/01 收盤，單日 +0.86%）→ 無系統風險，不恐慌不追高</a:t>
+              <a:t>📈 台股 48,476（10/02 收盤，單日 +0.25%）→ 無系統風險，不恐慌不追高</a:t>
             </a:r>
           </a:p>
           <a:p>
@@ -3943,7 +3943,7 @@
               </a:defRPr>
             </a:pPr>
             <a:r>
-              <a:t>即時市場：台股 48,353（+0.86%）</a:t>
+              <a:t>即時市場：台股 48,476（+0.25%）</a:t>
             </a:r>
           </a:p>
         </p:txBody>
@@ -4016,7 +4016,7 @@
               </a:defRPr>
             </a:pPr>
             <a:r>
-              <a:t>📈 台股最新收盤 48,353（單日 +0.86%），asof 10/01</a:t>
+              <a:t>📈 台股最新收盤 48,476（單日 +0.25%），asof 10/02</a:t>
             </a:r>
           </a:p>
           <a:p>
@@ -4058,7 +4058,7 @@
               </a:defRPr>
             </a:pPr>
             <a:r>
-              <a:t>💵 USD/TWD 31.92 — 台幣偏強（較 7/29 高點 32.38 +1.4%）</a:t>
+              <a:t>💵 USD/TWD 31.80 — 台幣偏強（較 7/29 高點 32.38 +1.8%）</a:t>
             </a:r>
           </a:p>
           <a:p>
@@ -4100,7 +4100,7 @@
               </a:defRPr>
             </a:pPr>
             <a:r>
-              <a:t>📡 10yr 5.32% / 30yr 5.67% — 已達 5.30 凍結線，新增質押全域凍結</a:t>
+              <a:t>📡 10yr 5.28% / 30yr 5.63% — 已達 5.30 凍結線，新增質押全域凍結</a:t>
             </a:r>
           </a:p>
           <a:p>
@@ -4176,7 +4176,7 @@
               </a:defRPr>
             </a:pPr>
             <a:r>
-              <a:t>匯率 31.92 — 台幣偏強，美元曝險的雙面刃</a:t>
+              <a:t>匯率 31.80 — 台幣偏強，美元曝險的雙面刃</a:t>
             </a:r>
           </a:p>
         </p:txBody>
@@ -4264,7 +4264,7 @@
               </a:defRPr>
             </a:pPr>
             <a:r>
-              <a:t>     7/29 高點 32.38 → 如今 31.92（台幣偏強 +1.4%）</a:t>
+              <a:t>     7/29 高點 32.38 → 如今 31.80（台幣偏強 +1.8%）</a:t>
             </a:r>
           </a:p>
           <a:p>
@@ -5167,22 +5167,7 @@
               </a:defRPr>
             </a:pPr>
             <a:r>
-              <a:t>🔴 保單借貸 0 萬 @4%+ → 質押 590 萬@2.65% 償還（9/29 已撥款入帳）</a:t>
-            </a:r>
-          </a:p>
-          <a:p>
-            <a:pPr>
-              <a:spcAft>
-                <a:spcPts val="500"/>
-              </a:spcAft>
-              <a:defRPr sz="1500">
-                <a:solidFill>
-                  <a:srgbClr val="FFFFFF"/>
-                </a:solidFill>
-              </a:defRPr>
-            </a:pPr>
-            <a:r>
-              <a:t>     （第一批 200 萬已提出還款申請、待入帳；餘 300 萬待執行）利息成本 4% → 2.65%</a:t>
+              <a:t>✅ 保單借貸已全數清償（2026-09-29＋10-01，餘額 0）→ 質押 590 萬完成置換，利息成本 4% → 2.65%</a:t>
             </a:r>
           </a:p>
           <a:p>
@@ -5744,7 +5729,7 @@
               </a:defRPr>
             </a:pPr>
             <a:r>
-              <a:t>🔴 情境A：升息（30yr 5.67% 警戒區，CPI 9/11 關鍵）</a:t>
+              <a:t>🔴 情境A：升息（30yr 5.63% 警戒區，CPI 9/11 關鍵）</a:t>
             </a:r>
           </a:p>
           <a:p>
@@ -6019,7 +6004,7 @@
               </a:defRPr>
             </a:pPr>
             <a:r>
-              <a:t>📅 質押：🔍 質押：擔保池 1,200萬（富達600＋聯博100＋貝萊德B11 500）×5.0成 = 590萬@2.65%（2026-09-29 使用者確認；原記 2.77%，待銀行書面覆核）；已撥款 → 用途：優先清償 0萬高息負債（保單質押 0萬@4.0% ＋ 券商質押 0萬@3.92%）— 月息 0 → 0，月省約 0（2026-09-12 裁示；10月標案押標金不預留，9月底評估）</a:t>
+              <a:t>📅 質押：🔍 質押：擔保池 1,200萬（富達600＋聯博100＋貝萊德B11 500）×5成 = 590萬@2.65%（2026-09-29 使用者確認；原記 2.77%，待銀行書面覆核）；已撥款 → 用途：優先清償 0萬高息負債（保單質押 0萬@4.0% ＋ 券商質押 0萬@3.92%）— 月息 0 → 0，月省約 0（2026-09-12 裁示；10月標案押標金不預留，9月底評估）</a:t>
             </a:r>
           </a:p>
           <a:p>

--- a/grand_pivot_deck.pptx
+++ b/grand_pivot_deck.pptx
@@ -3171,7 +3171,7 @@
               </a:defRPr>
             </a:pPr>
             <a:r>
-              <a:t>USD/TWD 31.80  ×  台股 48,476（10/02 收盤）  ×  10yr 5.28%</a:t>
+              <a:t>（美元曝險目前為 🟡 僅顯示：政策門檻待 10 月戰略檢討，不觸發資產調整）</a:t>
             </a:r>
           </a:p>
         </p:txBody>
@@ -3209,7 +3209,7 @@
               </a:defRPr>
             </a:pPr>
             <a:r>
-              <a:t>數據基準：10/02 最新收盤（執行時自動抓取）｜ 龍九控股策略框架 9/6 核准</a:t>
+              <a:t>數據基準：10/06 最新收盤（執行時自動抓取）｜ 龍九控股策略框架 9/6 核准</a:t>
             </a:r>
           </a:p>
           <a:p>
@@ -3744,7 +3744,7 @@
               </a:defRPr>
             </a:pPr>
             <a:r>
-              <a:t>💰 匯率 31.80：台幣偏強 → 不再加碼美元曝險，等 10 月重評估</a:t>
+              <a:t>（美元曝險目前為 🟡 僅顯示：政策門檻待 10 月戰略檢討，不觸發資產調整）</a:t>
             </a:r>
           </a:p>
           <a:p>
@@ -3798,7 +3798,7 @@
               </a:defRPr>
             </a:pPr>
             <a:r>
-              <a:t>📈 台股 48,476（10/02 收盤，單日 +0.25%）→ 無系統風險，不恐慌不追高</a:t>
+              <a:t>📈 台股 49,712（10/06 收盤，單日 +2.55%）→ 無系統風險，不恐慌不追高</a:t>
             </a:r>
           </a:p>
           <a:p>
@@ -3943,7 +3943,7 @@
               </a:defRPr>
             </a:pPr>
             <a:r>
-              <a:t>即時市場：台股 48,476（+0.25%）</a:t>
+              <a:t>即時市場：台股 49,712（+2.55%）</a:t>
             </a:r>
           </a:p>
         </p:txBody>
@@ -4016,7 +4016,7 @@
               </a:defRPr>
             </a:pPr>
             <a:r>
-              <a:t>📈 台股最新收盤 48,476（單日 +0.25%），asof 10/02</a:t>
+              <a:t>📈 台股最新收盤 49,712（單日 +2.55%），asof 10/06</a:t>
             </a:r>
           </a:p>
           <a:p>
@@ -4058,49 +4058,49 @@
               </a:defRPr>
             </a:pPr>
             <a:r>
-              <a:t>💵 USD/TWD 31.80 — 台幣偏強（較 7/29 高點 32.38 +1.8%）</a:t>
-            </a:r>
-          </a:p>
-          <a:p>
-            <a:pPr>
-              <a:spcAft>
-                <a:spcPts val="500"/>
-              </a:spcAft>
-              <a:defRPr sz="1500">
-                <a:solidFill>
-                  <a:srgbClr val="FFFFFF"/>
-                </a:solidFill>
-              </a:defRPr>
-            </a:pPr>
-            <a:r>
-              <a:t>     美元資產以台幣計價估值波動 — 長期配置不因短期匯率調整</a:t>
-            </a:r>
-          </a:p>
-          <a:p>
-            <a:pPr>
-              <a:spcAft>
-                <a:spcPts val="500"/>
-              </a:spcAft>
-              <a:defRPr sz="1500">
-                <a:solidFill>
-                  <a:srgbClr val="FFFFFF"/>
-                </a:solidFill>
-              </a:defRPr>
-            </a:pPr>
-          </a:p>
-          <a:p>
-            <a:pPr>
-              <a:spcAft>
-                <a:spcPts val="500"/>
-              </a:spcAft>
-              <a:defRPr sz="1500">
-                <a:solidFill>
-                  <a:srgbClr val="FFFFFF"/>
-                </a:solidFill>
-              </a:defRPr>
-            </a:pPr>
-            <a:r>
-              <a:t>📡 10yr 5.28% / 30yr 5.63% — 已達 5.30 凍結線，新增質押全域凍結</a:t>
+              <a:t>（美元曝險目前為 🟡 僅顯示：政策門檻待 10 月戰略檢討，不觸發資產調整）</a:t>
+            </a:r>
+          </a:p>
+          <a:p>
+            <a:pPr>
+              <a:spcAft>
+                <a:spcPts val="500"/>
+              </a:spcAft>
+              <a:defRPr sz="1500">
+                <a:solidFill>
+                  <a:srgbClr val="FFFFFF"/>
+                </a:solidFill>
+              </a:defRPr>
+            </a:pPr>
+            <a:r>
+              <a:t>（美元曝險目前為 🟡 僅顯示：政策門檻待 10 月戰略檢討，不觸發資產調整）</a:t>
+            </a:r>
+          </a:p>
+          <a:p>
+            <a:pPr>
+              <a:spcAft>
+                <a:spcPts val="500"/>
+              </a:spcAft>
+              <a:defRPr sz="1500">
+                <a:solidFill>
+                  <a:srgbClr val="FFFFFF"/>
+                </a:solidFill>
+              </a:defRPr>
+            </a:pPr>
+          </a:p>
+          <a:p>
+            <a:pPr>
+              <a:spcAft>
+                <a:spcPts val="500"/>
+              </a:spcAft>
+              <a:defRPr sz="1500">
+                <a:solidFill>
+                  <a:srgbClr val="FFFFFF"/>
+                </a:solidFill>
+              </a:defRPr>
+            </a:pPr>
+            <a:r>
+              <a:t>📡 10yr 5.27% / 30yr 5.64% — 已達 5.30 凍結線，新增質押全域凍結</a:t>
             </a:r>
           </a:p>
           <a:p>
@@ -4176,7 +4176,7 @@
               </a:defRPr>
             </a:pPr>
             <a:r>
-              <a:t>匯率 31.80 — 台幣偏強，美元曝險的雙面刃</a:t>
+              <a:t>匯率 31.80 — 台幣偏強</a:t>
             </a:r>
           </a:p>
         </p:txBody>
@@ -4211,7 +4211,7 @@
               </a:defRPr>
             </a:pPr>
             <a:r>
-              <a:t>美元曝險 59%（&gt;55% 監控線）→ 台幣升值 = 估值回吐風險</a:t>
+              <a:t>美元曝險 70.5%（🟡 僅顯示，門檻 60；政策門檻待 10 月戰略檢討）</a:t>
             </a:r>
           </a:p>
         </p:txBody>
@@ -4249,7 +4249,7 @@
               </a:defRPr>
             </a:pPr>
             <a:r>
-              <a:t>🔵 美股ETF + 安聯保單 + 美元基金合計曝險已超監控線</a:t>
+              <a:t>🔵 美股ETF + 安聯保單 + 基金部位之計價結構僅供觀察（🟡 僅顯示，政策門檻待 10 月戰略檢討）</a:t>
             </a:r>
           </a:p>
           <a:p>
@@ -4279,7 +4279,7 @@
               </a:defRPr>
             </a:pPr>
             <a:r>
-              <a:t>     台幣若續強，美元資產以台幣計價縮水（未實現）</a:t>
+              <a:t>     匯率變動對資產之計價影響僅供參考（未實現）</a:t>
             </a:r>
           </a:p>
           <a:p>
@@ -4363,7 +4363,7 @@
               </a:defRPr>
             </a:pPr>
             <a:r>
-              <a:t>     沒標到 → 重評估匯率/美元曝險/利率是否見頂，再換匯建 ladder 或還債</a:t>
+              <a:t>     沒標到 → 重評估匯率、利率是否見頂與曝險結構，再換匯建 ladder 或還債</a:t>
             </a:r>
           </a:p>
           <a:p>
@@ -4405,7 +4405,7 @@
               </a:defRPr>
             </a:pPr>
             <a:r>
-              <a:t>📊 結論：匯率方向已逆轉 → 不再加碼美元曝險，等 10 月重評估</a:t>
+              <a:t>（美元曝險目前為 🟡 僅顯示：政策門檻待 10 月戰略檢討，不觸發資產調整）</a:t>
             </a:r>
           </a:p>
         </p:txBody>
@@ -4501,7 +4501,7 @@
               </a:defRPr>
             </a:pPr>
             <a:r>
-              <a:t>證券總市值 3,007,220 元（snapshot 9/4）— 台股 8/24 裁示暫緩、9/6 全面觀望</a:t>
+              <a:t>證券總市值 3,064,250 元（snapshot 9/4）— 台股 8/24 裁示暫緩、9/6 全面觀望</a:t>
             </a:r>
           </a:p>
         </p:txBody>
@@ -4566,112 +4566,112 @@
               </a:defRPr>
             </a:pPr>
             <a:r>
-              <a:t>   0050        225,800  (+33.0%)  元大台灣50</a:t>
-            </a:r>
-          </a:p>
-          <a:p>
-            <a:pPr>
-              <a:spcAft>
-                <a:spcPts val="500"/>
-              </a:spcAft>
-              <a:defRPr sz="1500">
-                <a:solidFill>
-                  <a:srgbClr val="FFFFFF"/>
-                </a:solidFill>
-              </a:defRPr>
-            </a:pPr>
-            <a:r>
-              <a:t>   006208      516,500  (+31.2%)  富邦台50</a:t>
-            </a:r>
-          </a:p>
-          <a:p>
-            <a:pPr>
-              <a:spcAft>
-                <a:spcPts val="500"/>
-              </a:spcAft>
-              <a:defRPr sz="1500">
-                <a:solidFill>
-                  <a:srgbClr val="FFFFFF"/>
-                </a:solidFill>
-              </a:defRPr>
-            </a:pPr>
-            <a:r>
-              <a:t>   009816      265,600  (+32.9%)  凱基台灣TOP50</a:t>
-            </a:r>
-          </a:p>
-          <a:p>
-            <a:pPr>
-              <a:spcAft>
-                <a:spcPts val="500"/>
-              </a:spcAft>
-              <a:defRPr sz="1500">
-                <a:solidFill>
-                  <a:srgbClr val="FFFFFF"/>
-                </a:solidFill>
-              </a:defRPr>
-            </a:pPr>
-            <a:r>
-              <a:t>   00646        77,500  (+8.2%)  元大S&amp;P500</a:t>
-            </a:r>
-          </a:p>
-          <a:p>
-            <a:pPr>
-              <a:spcAft>
-                <a:spcPts val="500"/>
-              </a:spcAft>
-              <a:defRPr sz="1500">
-                <a:solidFill>
-                  <a:srgbClr val="FFFFFF"/>
-                </a:solidFill>
-              </a:defRPr>
-            </a:pPr>
-            <a:r>
-              <a:t>   00713       125,700  (+14.7%)  元大台灣高息低波</a:t>
-            </a:r>
-          </a:p>
-          <a:p>
-            <a:pPr>
-              <a:spcAft>
-                <a:spcPts val="500"/>
-              </a:spcAft>
-              <a:defRPr sz="1500">
-                <a:solidFill>
-                  <a:srgbClr val="FFFFFF"/>
-                </a:solidFill>
-              </a:defRPr>
-            </a:pPr>
-            <a:r>
-              <a:t>   00878       523,350  (+28.4%)  國泰永續高股息</a:t>
-            </a:r>
-          </a:p>
-          <a:p>
-            <a:pPr>
-              <a:spcAft>
-                <a:spcPts val="500"/>
-              </a:spcAft>
-              <a:defRPr sz="1500">
-                <a:solidFill>
-                  <a:srgbClr val="FFFFFF"/>
-                </a:solidFill>
-              </a:defRPr>
-            </a:pPr>
-            <a:r>
-              <a:t>   0056         56,850  (+53.0%)  元大高股息</a:t>
-            </a:r>
-          </a:p>
-          <a:p>
-            <a:pPr>
-              <a:spcAft>
-                <a:spcPts val="500"/>
-              </a:spcAft>
-              <a:defRPr sz="1500">
-                <a:solidFill>
-                  <a:srgbClr val="FFFFFF"/>
-                </a:solidFill>
-              </a:defRPr>
-            </a:pPr>
-            <a:r>
-              <a:t>   00981A      248,000  (+17.8%)  主動統一台灣增長</a:t>
+              <a:t>   0050        233,000  (+37.2%)  元大台灣50</a:t>
+            </a:r>
+          </a:p>
+          <a:p>
+            <a:pPr>
+              <a:spcAft>
+                <a:spcPts val="500"/>
+              </a:spcAft>
+              <a:defRPr sz="1500">
+                <a:solidFill>
+                  <a:srgbClr val="FFFFFF"/>
+                </a:solidFill>
+              </a:defRPr>
+            </a:pPr>
+            <a:r>
+              <a:t>   006208      531,800  (+35.0%)  富邦台50</a:t>
+            </a:r>
+          </a:p>
+          <a:p>
+            <a:pPr>
+              <a:spcAft>
+                <a:spcPts val="500"/>
+              </a:spcAft>
+              <a:defRPr sz="1500">
+                <a:solidFill>
+                  <a:srgbClr val="FFFFFF"/>
+                </a:solidFill>
+              </a:defRPr>
+            </a:pPr>
+            <a:r>
+              <a:t>   009816      272,960  (+36.6%)  凱基台灣TOP50</a:t>
+            </a:r>
+          </a:p>
+          <a:p>
+            <a:pPr>
+              <a:spcAft>
+                <a:spcPts val="500"/>
+              </a:spcAft>
+              <a:defRPr sz="1500">
+                <a:solidFill>
+                  <a:srgbClr val="FFFFFF"/>
+                </a:solidFill>
+              </a:defRPr>
+            </a:pPr>
+            <a:r>
+              <a:t>   00646        77,850  (+8.7%)  元大S&amp;P500</a:t>
+            </a:r>
+          </a:p>
+          <a:p>
+            <a:pPr>
+              <a:spcAft>
+                <a:spcPts val="500"/>
+              </a:spcAft>
+              <a:defRPr sz="1500">
+                <a:solidFill>
+                  <a:srgbClr val="FFFFFF"/>
+                </a:solidFill>
+              </a:defRPr>
+            </a:pPr>
+            <a:r>
+              <a:t>   00713       125,900  (+14.9%)  元大台灣高息低波</a:t>
+            </a:r>
+          </a:p>
+          <a:p>
+            <a:pPr>
+              <a:spcAft>
+                <a:spcPts val="500"/>
+              </a:spcAft>
+              <a:defRPr sz="1500">
+                <a:solidFill>
+                  <a:srgbClr val="FFFFFF"/>
+                </a:solidFill>
+              </a:defRPr>
+            </a:pPr>
+            <a:r>
+              <a:t>   00878       527,550  (+29.4%)  國泰永續高股息</a:t>
+            </a:r>
+          </a:p>
+          <a:p>
+            <a:pPr>
+              <a:spcAft>
+                <a:spcPts val="500"/>
+              </a:spcAft>
+              <a:defRPr sz="1500">
+                <a:solidFill>
+                  <a:srgbClr val="FFFFFF"/>
+                </a:solidFill>
+              </a:defRPr>
+            </a:pPr>
+            <a:r>
+              <a:t>   0056         58,100  (+56.4%)  元大高股息</a:t>
+            </a:r>
+          </a:p>
+          <a:p>
+            <a:pPr>
+              <a:spcAft>
+                <a:spcPts val="500"/>
+              </a:spcAft>
+              <a:defRPr sz="1500">
+                <a:solidFill>
+                  <a:srgbClr val="FFFFFF"/>
+                </a:solidFill>
+              </a:defRPr>
+            </a:pPr>
+            <a:r>
+              <a:t>   00981A      260,800  (+23.9%)  主動統一台灣增長</a:t>
             </a:r>
           </a:p>
           <a:p>
@@ -4866,7 +4866,7 @@
               </a:defRPr>
             </a:pPr>
             <a:r>
-              <a:t>基金總市值 12,611,674 元（snapshot 9/4 報價日 9/3）</a:t>
+              <a:t>基金總市值 12,522,002 元（snapshot 9/4 報價日 9/3）</a:t>
             </a:r>
           </a:p>
         </p:txBody>
@@ -4919,37 +4919,37 @@
               </a:defRPr>
             </a:pPr>
             <a:r>
-              <a:t>     富達全球動能B月配美元 5,881,827 元 — 月配息主力</a:t>
-            </a:r>
-          </a:p>
-          <a:p>
-            <a:pPr>
-              <a:spcAft>
-                <a:spcPts val="500"/>
-              </a:spcAft>
-              <a:defRPr sz="1500">
-                <a:solidFill>
-                  <a:srgbClr val="FFFFFF"/>
-                </a:solidFill>
-              </a:defRPr>
-            </a:pPr>
-            <a:r>
-              <a:t>     貝萊德B11 強化穩定月配息 4,896,288 元（原 MMF 500 萬贖回款轉申購；⛔ 原「500萬標案預備金」已作廢 9/11）</a:t>
-            </a:r>
-          </a:p>
-          <a:p>
-            <a:pPr>
-              <a:spcAft>
-                <a:spcPts val="500"/>
-              </a:spcAft>
-              <a:defRPr sz="1500">
-                <a:solidFill>
-                  <a:srgbClr val="FFFFFF"/>
-                </a:solidFill>
-              </a:defRPr>
-            </a:pPr>
-            <a:r>
-              <a:t>     聯博全球多元收益AD美元月配 959,826 元</a:t>
+              <a:t>（美元曝險目前為 🟡 僅顯示：政策門檻待 10 月戰略檢討，不觸發資產調整）</a:t>
+            </a:r>
+          </a:p>
+          <a:p>
+            <a:pPr>
+              <a:spcAft>
+                <a:spcPts val="500"/>
+              </a:spcAft>
+              <a:defRPr sz="1500">
+                <a:solidFill>
+                  <a:srgbClr val="FFFFFF"/>
+                </a:solidFill>
+              </a:defRPr>
+            </a:pPr>
+            <a:r>
+              <a:t>     貝萊德B11 強化穩定月配息 4,882,121 元（原 MMF 500 萬贖回款轉申購；⛔ 原「500萬標案預備金」已作廢 9/11）</a:t>
+            </a:r>
+          </a:p>
+          <a:p>
+            <a:pPr>
+              <a:spcAft>
+                <a:spcPts val="500"/>
+              </a:spcAft>
+              <a:defRPr sz="1500">
+                <a:solidFill>
+                  <a:srgbClr val="FFFFFF"/>
+                </a:solidFill>
+              </a:defRPr>
+            </a:pPr>
+            <a:r>
+              <a:t>     聯博全球多元收益AD美元月配 963,376 元</a:t>
             </a:r>
           </a:p>
           <a:p>
@@ -4991,7 +4991,7 @@
               </a:defRPr>
             </a:pPr>
             <a:r>
-              <a:t>     ⚠️ 美元/日圓計價部位多 → 計入外幣曝險，續抱不加碼</a:t>
+              <a:t>（美元曝險目前為 🟡 僅顯示：政策門檻待 10 月戰略檢討，不觸發資產調整）</a:t>
             </a:r>
           </a:p>
           <a:p>
@@ -5401,7 +5401,7 @@
               </a:defRPr>
             </a:pPr>
             <a:r>
-              <a:t>穿透：台股 7.6%｜美股 38.3%（科技15.1）｜防守配息 16.7%｜債券 27.6%｜現金 3.2%</a:t>
+              <a:t>穿透：台股 7.9%｜美股 37.5%（科技14.9）｜防守配息 18.1%｜債券 26.7%｜現金 3.3%</a:t>
             </a:r>
           </a:p>
         </p:txBody>
@@ -5469,7 +5469,7 @@
               </a:defRPr>
             </a:pPr>
             <a:r>
-              <a:t>     台股穿透 7.6% → 偏低，但觀望期凍結新增</a:t>
+              <a:t>     台股穿透 7.9% → 偏低，但觀望期凍結新增</a:t>
             </a:r>
           </a:p>
           <a:p>
@@ -5580,22 +5580,22 @@
               </a:defRPr>
             </a:pPr>
             <a:r>
-              <a:t>📊 現金/安全網穿透 3.2%：底線 70 萬已守住</a:t>
-            </a:r>
-          </a:p>
-          <a:p>
-            <a:pPr>
-              <a:spcAft>
-                <a:spcPts val="500"/>
-              </a:spcAft>
-              <a:defRPr sz="1500">
-                <a:solidFill>
-                  <a:srgbClr val="FFFFFF"/>
-                </a:solidFill>
-              </a:defRPr>
-            </a:pPr>
-            <a:r>
-              <a:t>     口徑 = 台幣帳戶（不含外幣），月支出 ×3 安全水位達標</a:t>
+              <a:t>📊 現金/安全網穿透 3.3%：底線 70 萬已守住</a:t>
+            </a:r>
+          </a:p>
+          <a:p>
+            <a:pPr>
+              <a:spcAft>
+                <a:spcPts val="500"/>
+              </a:spcAft>
+              <a:defRPr sz="1500">
+                <a:solidFill>
+                  <a:srgbClr val="FFFFFF"/>
+                </a:solidFill>
+              </a:defRPr>
+            </a:pPr>
+            <a:r>
+              <a:t>（美元曝險目前為 🟡 僅顯示：政策門檻待 10 月戰略檢討，不觸發資產調整）</a:t>
             </a:r>
           </a:p>
         </p:txBody>
@@ -5729,7 +5729,7 @@
               </a:defRPr>
             </a:pPr>
             <a:r>
-              <a:t>🔴 情境A：升息（30yr 5.63% 警戒區，CPI 9/11 關鍵）</a:t>
+              <a:t>🔴 情境A：升息（30yr 5.64% 警戒區，CPI 9/11 關鍵）</a:t>
             </a:r>
           </a:p>
           <a:p>
@@ -5786,7 +5786,7 @@
               </a:defRPr>
             </a:pPr>
             <a:r>
-              <a:t>     月配息覆蓋生活費 ✅ 債券梯照收息 ✅ 美元曝險不再加碼 ✅</a:t>
+              <a:t>（美元曝險目前為 🟡 僅顯示：政策門檻待 10 月戰略檢討，不觸發資產調整）</a:t>
             </a:r>
           </a:p>
           <a:p>
@@ -5870,7 +5870,7 @@
               </a:defRPr>
             </a:pPr>
             <a:r>
-              <a:t>     債務清洗監測啟動（DXY 月跌&gt;3% / 10Y breakeven&gt;3% 等觸發才動作）</a:t>
+              <a:t>（美元曝險目前為 🟡 僅顯示：政策門檻待 10 月戰略檢討，不觸發資產調整）</a:t>
             </a:r>
           </a:p>
         </p:txBody>

--- a/grand_pivot_deck.pptx
+++ b/grand_pivot_deck.pptx
@@ -4176,7 +4176,7 @@
               </a:defRPr>
             </a:pPr>
             <a:r>
-              <a:t>匯率 31.80 — 台幣偏強</a:t>
+              <a:t>匯率 31.78 — 台幣偏強</a:t>
             </a:r>
           </a:p>
         </p:txBody>
@@ -4264,7 +4264,7 @@
               </a:defRPr>
             </a:pPr>
             <a:r>
-              <a:t>     7/29 高點 32.38 → 如今 31.80（台幣偏強 +1.8%）</a:t>
+              <a:t>     7/29 高點 32.38 → 如今 31.78（台幣偏強 +1.9%）</a:t>
             </a:r>
           </a:p>
           <a:p>

--- a/grand_pivot_deck.pptx
+++ b/grand_pivot_deck.pptx
@@ -3209,7 +3209,7 @@
               </a:defRPr>
             </a:pPr>
             <a:r>
-              <a:t>數據基準：10/06 最新收盤（執行時自動抓取）｜ 龍九控股策略框架 9/6 核准</a:t>
+              <a:t>數據基準：10/08 最新收盤（執行時自動抓取）｜ 龍九控股策略框架 9/6 核准</a:t>
             </a:r>
           </a:p>
           <a:p>
@@ -3798,7 +3798,7 @@
               </a:defRPr>
             </a:pPr>
             <a:r>
-              <a:t>📈 台股 49,712（10/06 收盤，單日 +2.55%）→ 無系統風險，不恐慌不追高</a:t>
+              <a:t>📈 台股 49,313（10/08 收盤，單日 -0.99%）→ 無系統風險，不恐慌不追高</a:t>
             </a:r>
           </a:p>
           <a:p>
@@ -3943,7 +3943,7 @@
               </a:defRPr>
             </a:pPr>
             <a:r>
-              <a:t>即時市場：台股 49,712（+2.55%）</a:t>
+              <a:t>即時市場：台股 49,313（-0.99%）</a:t>
             </a:r>
           </a:p>
         </p:txBody>
@@ -4016,7 +4016,7 @@
               </a:defRPr>
             </a:pPr>
             <a:r>
-              <a:t>📈 台股最新收盤 49,712（單日 +2.55%），asof 10/06</a:t>
+              <a:t>📈 台股最新收盤 49,313（單日 -0.99%），asof 10/08</a:t>
             </a:r>
           </a:p>
           <a:p>
@@ -4100,7 +4100,7 @@
               </a:defRPr>
             </a:pPr>
             <a:r>
-              <a:t>📡 10yr 5.27% / 30yr 5.64% — 已達 5.30 凍結線，新增質押全域凍結</a:t>
+              <a:t>📡 10yr 5.24% / 30yr 5.60% — 已達 5.30 凍結線，新增質押全域凍結</a:t>
             </a:r>
           </a:p>
           <a:p>
@@ -4176,7 +4176,7 @@
               </a:defRPr>
             </a:pPr>
             <a:r>
-              <a:t>匯率 31.78 — 台幣偏強</a:t>
+              <a:t>匯率 31.92 — 台幣偏強</a:t>
             </a:r>
           </a:p>
         </p:txBody>
@@ -4211,7 +4211,7 @@
               </a:defRPr>
             </a:pPr>
             <a:r>
-              <a:t>美元曝險 70.5%（🟡 僅顯示，門檻 60；政策門檻待 10 月戰略檢討）</a:t>
+              <a:t>美元曝險 71.4%（🟡 僅顯示，門檻 60；政策門檻待 10 月戰略檢討）</a:t>
             </a:r>
           </a:p>
         </p:txBody>
@@ -4264,7 +4264,7 @@
               </a:defRPr>
             </a:pPr>
             <a:r>
-              <a:t>     7/29 高點 32.38 → 如今 31.78（台幣偏強 +1.9%）</a:t>
+              <a:t>     7/29 高點 32.38 → 如今 31.92（台幣偏強 +1.4%）</a:t>
             </a:r>
           </a:p>
           <a:p>
@@ -4501,7 +4501,7 @@
               </a:defRPr>
             </a:pPr>
             <a:r>
-              <a:t>證券總市值 3,064,250 元（snapshot 9/4）— 台股 8/24 裁示暫緩、9/6 全面觀望</a:t>
+              <a:t>證券總市值 3,045,250 元（snapshot 9/4）— 台股 8/24 裁示暫緩、9/6 全面觀望</a:t>
             </a:r>
           </a:p>
         </p:txBody>
@@ -4566,112 +4566,112 @@
               </a:defRPr>
             </a:pPr>
             <a:r>
-              <a:t>   0050        233,000  (+37.2%)  元大台灣50</a:t>
-            </a:r>
-          </a:p>
-          <a:p>
-            <a:pPr>
-              <a:spcAft>
-                <a:spcPts val="500"/>
-              </a:spcAft>
-              <a:defRPr sz="1500">
-                <a:solidFill>
-                  <a:srgbClr val="FFFFFF"/>
-                </a:solidFill>
-              </a:defRPr>
-            </a:pPr>
-            <a:r>
-              <a:t>   006208      531,800  (+35.0%)  富邦台50</a:t>
-            </a:r>
-          </a:p>
-          <a:p>
-            <a:pPr>
-              <a:spcAft>
-                <a:spcPts val="500"/>
-              </a:spcAft>
-              <a:defRPr sz="1500">
-                <a:solidFill>
-                  <a:srgbClr val="FFFFFF"/>
-                </a:solidFill>
-              </a:defRPr>
-            </a:pPr>
-            <a:r>
-              <a:t>   009816      272,960  (+36.6%)  凱基台灣TOP50</a:t>
-            </a:r>
-          </a:p>
-          <a:p>
-            <a:pPr>
-              <a:spcAft>
-                <a:spcPts val="500"/>
-              </a:spcAft>
-              <a:defRPr sz="1500">
-                <a:solidFill>
-                  <a:srgbClr val="FFFFFF"/>
-                </a:solidFill>
-              </a:defRPr>
-            </a:pPr>
-            <a:r>
-              <a:t>   00646        77,850  (+8.7%)  元大S&amp;P500</a:t>
-            </a:r>
-          </a:p>
-          <a:p>
-            <a:pPr>
-              <a:spcAft>
-                <a:spcPts val="500"/>
-              </a:spcAft>
-              <a:defRPr sz="1500">
-                <a:solidFill>
-                  <a:srgbClr val="FFFFFF"/>
-                </a:solidFill>
-              </a:defRPr>
-            </a:pPr>
-            <a:r>
-              <a:t>   00713       125,900  (+14.9%)  元大台灣高息低波</a:t>
-            </a:r>
-          </a:p>
-          <a:p>
-            <a:pPr>
-              <a:spcAft>
-                <a:spcPts val="500"/>
-              </a:spcAft>
-              <a:defRPr sz="1500">
-                <a:solidFill>
-                  <a:srgbClr val="FFFFFF"/>
-                </a:solidFill>
-              </a:defRPr>
-            </a:pPr>
-            <a:r>
-              <a:t>   00878       527,550  (+29.4%)  國泰永續高股息</a:t>
-            </a:r>
-          </a:p>
-          <a:p>
-            <a:pPr>
-              <a:spcAft>
-                <a:spcPts val="500"/>
-              </a:spcAft>
-              <a:defRPr sz="1500">
-                <a:solidFill>
-                  <a:srgbClr val="FFFFFF"/>
-                </a:solidFill>
-              </a:defRPr>
-            </a:pPr>
-            <a:r>
-              <a:t>   0056         58,100  (+56.4%)  元大高股息</a:t>
-            </a:r>
-          </a:p>
-          <a:p>
-            <a:pPr>
-              <a:spcAft>
-                <a:spcPts val="500"/>
-              </a:spcAft>
-              <a:defRPr sz="1500">
-                <a:solidFill>
-                  <a:srgbClr val="FFFFFF"/>
-                </a:solidFill>
-              </a:defRPr>
-            </a:pPr>
-            <a:r>
-              <a:t>   00981A      260,800  (+23.9%)  主動統一台灣增長</a:t>
+              <a:t>   0050        230,200  (+35.6%)  元大台灣50</a:t>
+            </a:r>
+          </a:p>
+          <a:p>
+            <a:pPr>
+              <a:spcAft>
+                <a:spcPts val="500"/>
+              </a:spcAft>
+              <a:defRPr sz="1500">
+                <a:solidFill>
+                  <a:srgbClr val="FFFFFF"/>
+                </a:solidFill>
+              </a:defRPr>
+            </a:pPr>
+            <a:r>
+              <a:t>   006208      526,500  (+33.7%)  富邦台50</a:t>
+            </a:r>
+          </a:p>
+          <a:p>
+            <a:pPr>
+              <a:spcAft>
+                <a:spcPts val="500"/>
+              </a:spcAft>
+              <a:defRPr sz="1500">
+                <a:solidFill>
+                  <a:srgbClr val="FFFFFF"/>
+                </a:solidFill>
+              </a:defRPr>
+            </a:pPr>
+            <a:r>
+              <a:t>   009816      270,400  (+35.3%)  凱基台灣TOP50</a:t>
+            </a:r>
+          </a:p>
+          <a:p>
+            <a:pPr>
+              <a:spcAft>
+                <a:spcPts val="500"/>
+              </a:spcAft>
+              <a:defRPr sz="1500">
+                <a:solidFill>
+                  <a:srgbClr val="FFFFFF"/>
+                </a:solidFill>
+              </a:defRPr>
+            </a:pPr>
+            <a:r>
+              <a:t>   00646        78,050  (+9.0%)  元大S&amp;P500</a:t>
+            </a:r>
+          </a:p>
+          <a:p>
+            <a:pPr>
+              <a:spcAft>
+                <a:spcPts val="500"/>
+              </a:spcAft>
+              <a:defRPr sz="1500">
+                <a:solidFill>
+                  <a:srgbClr val="FFFFFF"/>
+                </a:solidFill>
+              </a:defRPr>
+            </a:pPr>
+            <a:r>
+              <a:t>   00713       126,400  (+15.3%)  元大台灣高息低波</a:t>
+            </a:r>
+          </a:p>
+          <a:p>
+            <a:pPr>
+              <a:spcAft>
+                <a:spcPts val="500"/>
+              </a:spcAft>
+              <a:defRPr sz="1500">
+                <a:solidFill>
+                  <a:srgbClr val="FFFFFF"/>
+                </a:solidFill>
+              </a:defRPr>
+            </a:pPr>
+            <a:r>
+              <a:t>   00878       525,150  (+28.9%)  國泰永續高股息</a:t>
+            </a:r>
+          </a:p>
+          <a:p>
+            <a:pPr>
+              <a:spcAft>
+                <a:spcPts val="500"/>
+              </a:spcAft>
+              <a:defRPr sz="1500">
+                <a:solidFill>
+                  <a:srgbClr val="FFFFFF"/>
+                </a:solidFill>
+              </a:defRPr>
+            </a:pPr>
+            <a:r>
+              <a:t>   0056         58,200  (+56.7%)  元大高股息</a:t>
+            </a:r>
+          </a:p>
+          <a:p>
+            <a:pPr>
+              <a:spcAft>
+                <a:spcPts val="500"/>
+              </a:spcAft>
+              <a:defRPr sz="1500">
+                <a:solidFill>
+                  <a:srgbClr val="FFFFFF"/>
+                </a:solidFill>
+              </a:defRPr>
+            </a:pPr>
+            <a:r>
+              <a:t>   00981A      255,120  (+21.2%)  主動統一台灣增長</a:t>
             </a:r>
           </a:p>
           <a:p>
@@ -4866,7 +4866,7 @@
               </a:defRPr>
             </a:pPr>
             <a:r>
-              <a:t>基金總市值 12,522,002 元（snapshot 9/4 報價日 9/3）</a:t>
+              <a:t>基金總市值 12,693,106 元（snapshot 9/4 報價日 9/3）</a:t>
             </a:r>
           </a:p>
         </p:txBody>
@@ -4934,22 +4934,22 @@
               </a:defRPr>
             </a:pPr>
             <a:r>
-              <a:t>     貝萊德B11 強化穩定月配息 4,882,121 元（原 MMF 500 萬贖回款轉申購；⛔ 原「500萬標案預備金」已作廢 9/11）</a:t>
-            </a:r>
-          </a:p>
-          <a:p>
-            <a:pPr>
-              <a:spcAft>
-                <a:spcPts val="500"/>
-              </a:spcAft>
-              <a:defRPr sz="1500">
-                <a:solidFill>
-                  <a:srgbClr val="FFFFFF"/>
-                </a:solidFill>
-              </a:defRPr>
-            </a:pPr>
-            <a:r>
-              <a:t>     聯博全球多元收益AD美元月配 963,376 元</a:t>
+              <a:t>     貝萊德B11 強化穩定月配息 4,922,710 元（原 MMF 500 萬贖回款轉申購；⛔ 原「500萬標案預備金」已作廢 9/11）</a:t>
+            </a:r>
+          </a:p>
+          <a:p>
+            <a:pPr>
+              <a:spcAft>
+                <a:spcPts val="500"/>
+              </a:spcAft>
+              <a:defRPr sz="1500">
+                <a:solidFill>
+                  <a:srgbClr val="FFFFFF"/>
+                </a:solidFill>
+              </a:defRPr>
+            </a:pPr>
+            <a:r>
+              <a:t>     聯博全球多元收益AD美元月配 968,889 元</a:t>
             </a:r>
           </a:p>
           <a:p>
@@ -5401,7 +5401,7 @@
               </a:defRPr>
             </a:pPr>
             <a:r>
-              <a:t>穿透：台股 7.9%｜美股 37.5%（科技14.9）｜防守配息 18.1%｜債券 26.7%｜現金 3.3%</a:t>
+              <a:t>穿透：台股 7.8%｜美股 38.1%（科技15.1）｜防守配息 18.2%｜債券 26.9%｜現金 2.4%</a:t>
             </a:r>
           </a:p>
         </p:txBody>
@@ -5469,7 +5469,7 @@
               </a:defRPr>
             </a:pPr>
             <a:r>
-              <a:t>     台股穿透 7.9% → 偏低，但觀望期凍結新增</a:t>
+              <a:t>     台股穿透 7.8% → 偏低，但觀望期凍結新增</a:t>
             </a:r>
           </a:p>
           <a:p>
@@ -5580,7 +5580,7 @@
               </a:defRPr>
             </a:pPr>
             <a:r>
-              <a:t>📊 現金/安全網穿透 3.3%：底線 70 萬已守住</a:t>
+              <a:t>📊 現金/安全網穿透 2.4%：底線 70 萬已守住</a:t>
             </a:r>
           </a:p>
           <a:p>
@@ -5729,7 +5729,7 @@
               </a:defRPr>
             </a:pPr>
             <a:r>
-              <a:t>🔴 情境A：升息（30yr 5.64% 警戒區，CPI 9/11 關鍵）</a:t>
+              <a:t>🔴 情境A：升息（30yr 5.60% 警戒區，CPI 9/11 關鍵）</a:t>
             </a:r>
           </a:p>
           <a:p>

--- a/grand_pivot_deck.pptx
+++ b/grand_pivot_deck.pptx
@@ -3209,7 +3209,7 @@
               </a:defRPr>
             </a:pPr>
             <a:r>
-              <a:t>數據基準：10/08 最新收盤（執行時自動抓取）｜ 龍九控股策略框架 9/6 核准</a:t>
+              <a:t>數據基準：10/16 最新收盤（執行時自動抓取）｜ 龍九控股策略框架 9/6 核准</a:t>
             </a:r>
           </a:p>
           <a:p>
@@ -3798,7 +3798,7 @@
               </a:defRPr>
             </a:pPr>
             <a:r>
-              <a:t>📈 台股 49,313（10/08 收盤，單日 -0.99%）→ 無系統風險，不恐慌不追高</a:t>
+              <a:t>📈 台股 47,111（10/16 收盤，單日 +0.30%）→ 無系統風險，不恐慌不追高</a:t>
             </a:r>
           </a:p>
           <a:p>
@@ -3943,7 +3943,7 @@
               </a:defRPr>
             </a:pPr>
             <a:r>
-              <a:t>即時市場：台股 49,313（-0.99%）</a:t>
+              <a:t>即時市場：台股 47,111（+0.30%）</a:t>
             </a:r>
           </a:p>
         </p:txBody>
@@ -3978,7 +3978,7 @@
               </a:defRPr>
             </a:pPr>
             <a:r>
-              <a:t>台股位處近一月高檔區 — 無系統性風險 ｜ 近一月低點 45,511</a:t>
+              <a:t>台股位處近一月高檔區 — 無系統性風險 ｜ 近一月低點 45,849</a:t>
             </a:r>
           </a:p>
         </p:txBody>
@@ -4016,7 +4016,7 @@
               </a:defRPr>
             </a:pPr>
             <a:r>
-              <a:t>📈 台股最新收盤 49,313（單日 -0.99%），asof 10/08</a:t>
+              <a:t>📈 台股最新收盤 47,111（單日 +0.30%），asof 10/16</a:t>
             </a:r>
           </a:p>
           <a:p>
@@ -4100,7 +4100,7 @@
               </a:defRPr>
             </a:pPr>
             <a:r>
-              <a:t>📡 10yr 5.24% / 30yr 5.60% — 已達 5.30 凍結線，新增質押全域凍結</a:t>
+              <a:t>📡 10yr 5.10% / 30yr 5.44% — 已達 5.30 凍結線，新增質押全域凍結</a:t>
             </a:r>
           </a:p>
           <a:p>
@@ -4176,7 +4176,7 @@
               </a:defRPr>
             </a:pPr>
             <a:r>
-              <a:t>匯率 31.92 — 台幣偏強</a:t>
+              <a:t>匯率 32.43 — 台幣偏弱</a:t>
             </a:r>
           </a:p>
         </p:txBody>
@@ -4211,7 +4211,7 @@
               </a:defRPr>
             </a:pPr>
             <a:r>
-              <a:t>美元曝險 71.4%（🟡 僅顯示，門檻 60；政策門檻待 10 月戰略檢討）</a:t>
+              <a:t>美元曝險 68.3%（🟡 僅顯示，門檻 60；政策門檻待 10 月戰略檢討）</a:t>
             </a:r>
           </a:p>
         </p:txBody>
@@ -4264,7 +4264,7 @@
               </a:defRPr>
             </a:pPr>
             <a:r>
-              <a:t>     7/29 高點 32.38 → 如今 31.92（台幣偏強 +1.4%）</a:t>
+              <a:t>     7/29 高點 32.38 → 如今 32.43（台幣偏弱 -0.1%）</a:t>
             </a:r>
           </a:p>
           <a:p>
@@ -4501,7 +4501,7 @@
               </a:defRPr>
             </a:pPr>
             <a:r>
-              <a:t>證券總市值 3,045,250 元（snapshot 9/4）— 台股 8/24 裁示暫緩、9/6 全面觀望</a:t>
+              <a:t>證券總市值 2,815,430 元（snapshot 9/4）— 台股 8/24 裁示暫緩、9/6 全面觀望</a:t>
             </a:r>
           </a:p>
         </p:txBody>
@@ -4566,112 +4566,112 @@
               </a:defRPr>
             </a:pPr>
             <a:r>
-              <a:t>   0050        230,200  (+35.6%)  元大台灣50</a:t>
-            </a:r>
-          </a:p>
-          <a:p>
-            <a:pPr>
-              <a:spcAft>
-                <a:spcPts val="500"/>
-              </a:spcAft>
-              <a:defRPr sz="1500">
-                <a:solidFill>
-                  <a:srgbClr val="FFFFFF"/>
-                </a:solidFill>
-              </a:defRPr>
-            </a:pPr>
-            <a:r>
-              <a:t>   006208      526,500  (+33.7%)  富邦台50</a:t>
-            </a:r>
-          </a:p>
-          <a:p>
-            <a:pPr>
-              <a:spcAft>
-                <a:spcPts val="500"/>
-              </a:spcAft>
-              <a:defRPr sz="1500">
-                <a:solidFill>
-                  <a:srgbClr val="FFFFFF"/>
-                </a:solidFill>
-              </a:defRPr>
-            </a:pPr>
-            <a:r>
-              <a:t>   009816      270,400  (+35.3%)  凱基台灣TOP50</a:t>
-            </a:r>
-          </a:p>
-          <a:p>
-            <a:pPr>
-              <a:spcAft>
-                <a:spcPts val="500"/>
-              </a:spcAft>
-              <a:defRPr sz="1500">
-                <a:solidFill>
-                  <a:srgbClr val="FFFFFF"/>
-                </a:solidFill>
-              </a:defRPr>
-            </a:pPr>
-            <a:r>
-              <a:t>   00646        78,050  (+9.0%)  元大S&amp;P500</a:t>
-            </a:r>
-          </a:p>
-          <a:p>
-            <a:pPr>
-              <a:spcAft>
-                <a:spcPts val="500"/>
-              </a:spcAft>
-              <a:defRPr sz="1500">
-                <a:solidFill>
-                  <a:srgbClr val="FFFFFF"/>
-                </a:solidFill>
-              </a:defRPr>
-            </a:pPr>
-            <a:r>
-              <a:t>   00713       126,400  (+15.3%)  元大台灣高息低波</a:t>
-            </a:r>
-          </a:p>
-          <a:p>
-            <a:pPr>
-              <a:spcAft>
-                <a:spcPts val="500"/>
-              </a:spcAft>
-              <a:defRPr sz="1500">
-                <a:solidFill>
-                  <a:srgbClr val="FFFFFF"/>
-                </a:solidFill>
-              </a:defRPr>
-            </a:pPr>
-            <a:r>
-              <a:t>   00878       525,150  (+28.9%)  國泰永續高股息</a:t>
-            </a:r>
-          </a:p>
-          <a:p>
-            <a:pPr>
-              <a:spcAft>
-                <a:spcPts val="500"/>
-              </a:spcAft>
-              <a:defRPr sz="1500">
-                <a:solidFill>
-                  <a:srgbClr val="FFFFFF"/>
-                </a:solidFill>
-              </a:defRPr>
-            </a:pPr>
-            <a:r>
-              <a:t>   0056         58,200  (+56.7%)  元大高股息</a:t>
-            </a:r>
-          </a:p>
-          <a:p>
-            <a:pPr>
-              <a:spcAft>
-                <a:spcPts val="500"/>
-              </a:spcAft>
-              <a:defRPr sz="1500">
-                <a:solidFill>
-                  <a:srgbClr val="FFFFFF"/>
-                </a:solidFill>
-              </a:defRPr>
-            </a:pPr>
-            <a:r>
-              <a:t>   00981A      255,120  (+21.2%)  主動統一台灣增長</a:t>
+              <a:t>   0050        218,000  (+28.4%)  元大台灣50</a:t>
+            </a:r>
+          </a:p>
+          <a:p>
+            <a:pPr>
+              <a:spcAft>
+                <a:spcPts val="500"/>
+              </a:spcAft>
+              <a:defRPr sz="1500">
+                <a:solidFill>
+                  <a:srgbClr val="FFFFFF"/>
+                </a:solidFill>
+              </a:defRPr>
+            </a:pPr>
+            <a:r>
+              <a:t>   006208      500,700  (+27.1%)  富邦台50</a:t>
+            </a:r>
+          </a:p>
+          <a:p>
+            <a:pPr>
+              <a:spcAft>
+                <a:spcPts val="500"/>
+              </a:spcAft>
+              <a:defRPr sz="1500">
+                <a:solidFill>
+                  <a:srgbClr val="FFFFFF"/>
+                </a:solidFill>
+              </a:defRPr>
+            </a:pPr>
+            <a:r>
+              <a:t>   009816      259,200  (+29.7%)  凱基台灣TOP50</a:t>
+            </a:r>
+          </a:p>
+          <a:p>
+            <a:pPr>
+              <a:spcAft>
+                <a:spcPts val="500"/>
+              </a:spcAft>
+              <a:defRPr sz="1500">
+                <a:solidFill>
+                  <a:srgbClr val="FFFFFF"/>
+                </a:solidFill>
+              </a:defRPr>
+            </a:pPr>
+            <a:r>
+              <a:t>   00646        79,350  (+10.8%)  元大S&amp;P500</a:t>
+            </a:r>
+          </a:p>
+          <a:p>
+            <a:pPr>
+              <a:spcAft>
+                <a:spcPts val="500"/>
+              </a:spcAft>
+              <a:defRPr sz="1500">
+                <a:solidFill>
+                  <a:srgbClr val="FFFFFF"/>
+                </a:solidFill>
+              </a:defRPr>
+            </a:pPr>
+            <a:r>
+              <a:t>   00713       131,600  (+20.1%)  元大台灣高息低波</a:t>
+            </a:r>
+          </a:p>
+          <a:p>
+            <a:pPr>
+              <a:spcAft>
+                <a:spcPts val="500"/>
+              </a:spcAft>
+              <a:defRPr sz="1500">
+                <a:solidFill>
+                  <a:srgbClr val="FFFFFF"/>
+                </a:solidFill>
+              </a:defRPr>
+            </a:pPr>
+            <a:r>
+              <a:t>   00878       532,950  (+30.8%)  國泰永續高股息</a:t>
+            </a:r>
+          </a:p>
+          <a:p>
+            <a:pPr>
+              <a:spcAft>
+                <a:spcPts val="500"/>
+              </a:spcAft>
+              <a:defRPr sz="1500">
+                <a:solidFill>
+                  <a:srgbClr val="FFFFFF"/>
+                </a:solidFill>
+              </a:defRPr>
+            </a:pPr>
+            <a:r>
+              <a:t>   0056         58,750  (+58.1%)  元大高股息</a:t>
+            </a:r>
+          </a:p>
+          <a:p>
+            <a:pPr>
+              <a:spcAft>
+                <a:spcPts val="500"/>
+              </a:spcAft>
+              <a:defRPr sz="1500">
+                <a:solidFill>
+                  <a:srgbClr val="FFFFFF"/>
+                </a:solidFill>
+              </a:defRPr>
+            </a:pPr>
+            <a:r>
+              <a:t>   00981A      236,240  (+12.2%)  主動統一台灣增長</a:t>
             </a:r>
           </a:p>
           <a:p>
@@ -4866,7 +4866,7 @@
               </a:defRPr>
             </a:pPr>
             <a:r>
-              <a:t>基金總市值 12,693,106 元（snapshot 9/4 報價日 9/3）</a:t>
+              <a:t>基金總市值 12,710,436 元（snapshot 9/4 報價日 9/3）</a:t>
             </a:r>
           </a:p>
         </p:txBody>
@@ -4934,22 +4934,22 @@
               </a:defRPr>
             </a:pPr>
             <a:r>
-              <a:t>     貝萊德B11 強化穩定月配息 4,922,710 元（原 MMF 500 萬贖回款轉申購；⛔ 原「500萬標案預備金」已作廢 9/11）</a:t>
-            </a:r>
-          </a:p>
-          <a:p>
-            <a:pPr>
-              <a:spcAft>
-                <a:spcPts val="500"/>
-              </a:spcAft>
-              <a:defRPr sz="1500">
-                <a:solidFill>
-                  <a:srgbClr val="FFFFFF"/>
-                </a:solidFill>
-              </a:defRPr>
-            </a:pPr>
-            <a:r>
-              <a:t>     聯博全球多元收益AD美元月配 968,889 元</a:t>
+              <a:t>     貝萊德B11 強化穩定月配息 5,023,075 元（原 MMF 500 萬贖回款轉申購；⛔ 原「500萬標案預備金」已作廢 9/11）</a:t>
+            </a:r>
+          </a:p>
+          <a:p>
+            <a:pPr>
+              <a:spcAft>
+                <a:spcPts val="500"/>
+              </a:spcAft>
+              <a:defRPr sz="1500">
+                <a:solidFill>
+                  <a:srgbClr val="FFFFFF"/>
+                </a:solidFill>
+              </a:defRPr>
+            </a:pPr>
+            <a:r>
+              <a:t>     聯博全球多元收益AD美元月配 980,225 元</a:t>
             </a:r>
           </a:p>
           <a:p>
@@ -5401,7 +5401,7 @@
               </a:defRPr>
             </a:pPr>
             <a:r>
-              <a:t>穿透：台股 7.8%｜美股 38.1%（科技15.1）｜防守配息 18.2%｜債券 26.9%｜現金 2.4%</a:t>
+              <a:t>穿透：台股 12.5%｜美股 36.6%（科技14.2）｜防守配息 17.8%｜債券 24.9%｜現金 4.3%</a:t>
             </a:r>
           </a:p>
         </p:txBody>
@@ -5469,7 +5469,7 @@
               </a:defRPr>
             </a:pPr>
             <a:r>
-              <a:t>     台股穿透 7.8% → 偏低，但觀望期凍結新增</a:t>
+              <a:t>     台股穿透 12.5% → 偏低，但觀望期凍結新增</a:t>
             </a:r>
           </a:p>
           <a:p>
@@ -5580,7 +5580,7 @@
               </a:defRPr>
             </a:pPr>
             <a:r>
-              <a:t>📊 現金/安全網穿透 2.4%：底線 70 萬已守住</a:t>
+              <a:t>📊 現金/安全網穿透 4.3%：底線 70 萬已守住</a:t>
             </a:r>
           </a:p>
           <a:p>
@@ -5729,7 +5729,7 @@
               </a:defRPr>
             </a:pPr>
             <a:r>
-              <a:t>🔴 情境A：升息（30yr 5.60% 警戒區，CPI 9/11 關鍵）</a:t>
+              <a:t>🔴 情境A：升息（30yr 5.44% 警戒區，CPI 9/11 關鍵）</a:t>
             </a:r>
           </a:p>
           <a:p>
@@ -6004,7 +6004,7 @@
               </a:defRPr>
             </a:pPr>
             <a:r>
-              <a:t>📅 質押：🔍 質押：擔保池 1,200萬（富達600＋聯博100＋貝萊德B11 500）×5成 = 590萬@2.65%（2026-09-29 使用者確認；原記 2.77%，待銀行書面覆核）；已撥款 → 用途：優先清償 0萬高息負債（保單質押 0萬@4.0% ＋ 券商質押 0萬@3.92%）— 月息 0 → 0，月省約 0（2026-09-12 裁示；10月標案押標金不預留，9月底評估）</a:t>
+              <a:t>📅 質押：🔍 質押：擔保池 1,200萬（富達600＋聯博100＋貝萊德B11 500）×5成 = 590萬@2.65%（2026-09-29 使用者確認；原記 2.77%，待銀行書面覆核）；已撥款 → 用途：優先清償 0萬高息負債（保單質押 0萬@4.0% ＋ 券商質押 0萬@3.92%）— 月息 0 → 0，月省約 0（2026-09-12 裁示；10 月標案押標金：❌ 已取消（2026-10-12 使用者裁決））</a:t>
             </a:r>
           </a:p>
           <a:p>

--- a/grand_pivot_deck.pptx
+++ b/grand_pivot_deck.pptx
@@ -3209,7 +3209,7 @@
               </a:defRPr>
             </a:pPr>
             <a:r>
-              <a:t>數據基準：10/16 最新收盤（執行時自動抓取）｜ 龍九控股策略框架 9/6 核准</a:t>
+              <a:t>數據基準：10/21 最新收盤（執行時自動抓取）｜ 龍九控股策略框架 9/6 核准</a:t>
             </a:r>
           </a:p>
           <a:p>
@@ -3798,7 +3798,7 @@
               </a:defRPr>
             </a:pPr>
             <a:r>
-              <a:t>📈 台股 47,111（10/16 收盤，單日 +0.30%）→ 無系統風險，不恐慌不追高</a:t>
+              <a:t>📈 台股 46,888（10/21 收盤，單日 +1.28%）→ 無系統風險，不恐慌不追高</a:t>
             </a:r>
           </a:p>
           <a:p>
@@ -3943,7 +3943,7 @@
               </a:defRPr>
             </a:pPr>
             <a:r>
-              <a:t>即時市場：台股 47,111（+0.30%）</a:t>
+              <a:t>即時市場：台股 46,888（+1.28%）</a:t>
             </a:r>
           </a:p>
         </p:txBody>
@@ -3978,7 +3978,7 @@
               </a:defRPr>
             </a:pPr>
             <a:r>
-              <a:t>台股位處近一月高檔區 — 無系統性風險 ｜ 近一月低點 45,849</a:t>
+              <a:t>台股位處近一月高檔區 — 無系統性風險 ｜ 近一月低點 46,293</a:t>
             </a:r>
           </a:p>
         </p:txBody>
@@ -4016,7 +4016,7 @@
               </a:defRPr>
             </a:pPr>
             <a:r>
-              <a:t>📈 台股最新收盤 47,111（單日 +0.30%），asof 10/16</a:t>
+              <a:t>📈 台股最新收盤 46,888（單日 +1.28%），asof 10/21</a:t>
             </a:r>
           </a:p>
           <a:p>
@@ -4100,7 +4100,7 @@
               </a:defRPr>
             </a:pPr>
             <a:r>
-              <a:t>📡 10yr 5.10% / 30yr 5.44% — 已達 5.30 凍結線，新增質押全域凍結</a:t>
+              <a:t>📡 10yr 5.12% / 30yr 5.43% — 已達 5.30 凍結線，新增質押全域凍結</a:t>
             </a:r>
           </a:p>
           <a:p>
@@ -4176,7 +4176,7 @@
               </a:defRPr>
             </a:pPr>
             <a:r>
-              <a:t>匯率 32.43 — 台幣偏弱</a:t>
+              <a:t>匯率 32.41 — 台幣偏弱</a:t>
             </a:r>
           </a:p>
         </p:txBody>
@@ -4211,7 +4211,7 @@
               </a:defRPr>
             </a:pPr>
             <a:r>
-              <a:t>美元曝險 68.3%（🟡 僅顯示，門檻 60；政策門檻待 10 月戰略檢討）</a:t>
+              <a:t>美元曝險 69.0%（🟡 僅顯示，門檻 60；政策門檻待 10 月戰略檢討）</a:t>
             </a:r>
           </a:p>
         </p:txBody>
@@ -4264,7 +4264,7 @@
               </a:defRPr>
             </a:pPr>
             <a:r>
-              <a:t>     7/29 高點 32.38 → 如今 32.43（台幣偏弱 -0.1%）</a:t>
+              <a:t>     7/29 高點 32.38 → 如今 32.41（台幣偏弱 -0.1%）</a:t>
             </a:r>
           </a:p>
           <a:p>
@@ -4501,7 +4501,7 @@
               </a:defRPr>
             </a:pPr>
             <a:r>
-              <a:t>證券總市值 2,815,430 元（snapshot 9/4）— 台股 8/24 裁示暫緩、9/6 全面觀望</a:t>
+              <a:t>證券總市值 2,784,660 元（snapshot 9/4）— 台股 8/24 裁示暫緩、9/6 全面觀望</a:t>
             </a:r>
           </a:p>
         </p:txBody>
@@ -4566,82 +4566,82 @@
               </a:defRPr>
             </a:pPr>
             <a:r>
-              <a:t>   0050        218,000  (+28.4%)  元大台灣50</a:t>
-            </a:r>
-          </a:p>
-          <a:p>
-            <a:pPr>
-              <a:spcAft>
-                <a:spcPts val="500"/>
-              </a:spcAft>
-              <a:defRPr sz="1500">
-                <a:solidFill>
-                  <a:srgbClr val="FFFFFF"/>
-                </a:solidFill>
-              </a:defRPr>
-            </a:pPr>
-            <a:r>
-              <a:t>   006208      500,700  (+27.1%)  富邦台50</a:t>
-            </a:r>
-          </a:p>
-          <a:p>
-            <a:pPr>
-              <a:spcAft>
-                <a:spcPts val="500"/>
-              </a:spcAft>
-              <a:defRPr sz="1500">
-                <a:solidFill>
-                  <a:srgbClr val="FFFFFF"/>
-                </a:solidFill>
-              </a:defRPr>
-            </a:pPr>
-            <a:r>
-              <a:t>   009816      259,200  (+29.7%)  凱基台灣TOP50</a:t>
-            </a:r>
-          </a:p>
-          <a:p>
-            <a:pPr>
-              <a:spcAft>
-                <a:spcPts val="500"/>
-              </a:spcAft>
-              <a:defRPr sz="1500">
-                <a:solidFill>
-                  <a:srgbClr val="FFFFFF"/>
-                </a:solidFill>
-              </a:defRPr>
-            </a:pPr>
-            <a:r>
-              <a:t>   00646        79,350  (+10.8%)  元大S&amp;P500</a:t>
-            </a:r>
-          </a:p>
-          <a:p>
-            <a:pPr>
-              <a:spcAft>
-                <a:spcPts val="500"/>
-              </a:spcAft>
-              <a:defRPr sz="1500">
-                <a:solidFill>
-                  <a:srgbClr val="FFFFFF"/>
-                </a:solidFill>
-              </a:defRPr>
-            </a:pPr>
-            <a:r>
-              <a:t>   00713       131,600  (+20.1%)  元大台灣高息低波</a:t>
-            </a:r>
-          </a:p>
-          <a:p>
-            <a:pPr>
-              <a:spcAft>
-                <a:spcPts val="500"/>
-              </a:spcAft>
-              <a:defRPr sz="1500">
-                <a:solidFill>
-                  <a:srgbClr val="FFFFFF"/>
-                </a:solidFill>
-              </a:defRPr>
-            </a:pPr>
-            <a:r>
-              <a:t>   00878       532,950  (+30.8%)  國泰永續高股息</a:t>
+              <a:t>   0050        216,300  (+27.4%)  元大台灣50</a:t>
+            </a:r>
+          </a:p>
+          <a:p>
+            <a:pPr>
+              <a:spcAft>
+                <a:spcPts val="500"/>
+              </a:spcAft>
+              <a:defRPr sz="1500">
+                <a:solidFill>
+                  <a:srgbClr val="FFFFFF"/>
+                </a:solidFill>
+              </a:defRPr>
+            </a:pPr>
+            <a:r>
+              <a:t>   006208      495,200  (+25.8%)  富邦台50</a:t>
+            </a:r>
+          </a:p>
+          <a:p>
+            <a:pPr>
+              <a:spcAft>
+                <a:spcPts val="500"/>
+              </a:spcAft>
+              <a:defRPr sz="1500">
+                <a:solidFill>
+                  <a:srgbClr val="FFFFFF"/>
+                </a:solidFill>
+              </a:defRPr>
+            </a:pPr>
+            <a:r>
+              <a:t>   009816      257,280  (+28.7%)  凱基台灣TOP50</a:t>
+            </a:r>
+          </a:p>
+          <a:p>
+            <a:pPr>
+              <a:spcAft>
+                <a:spcPts val="500"/>
+              </a:spcAft>
+              <a:defRPr sz="1500">
+                <a:solidFill>
+                  <a:srgbClr val="FFFFFF"/>
+                </a:solidFill>
+              </a:defRPr>
+            </a:pPr>
+            <a:r>
+              <a:t>   00646        79,200  (+10.6%)  元大S&amp;P500</a:t>
+            </a:r>
+          </a:p>
+          <a:p>
+            <a:pPr>
+              <a:spcAft>
+                <a:spcPts val="500"/>
+              </a:spcAft>
+              <a:defRPr sz="1500">
+                <a:solidFill>
+                  <a:srgbClr val="FFFFFF"/>
+                </a:solidFill>
+              </a:defRPr>
+            </a:pPr>
+            <a:r>
+              <a:t>   00713       130,600  (+19.2%)  元大台灣高息低波</a:t>
+            </a:r>
+          </a:p>
+          <a:p>
+            <a:pPr>
+              <a:spcAft>
+                <a:spcPts val="500"/>
+              </a:spcAft>
+              <a:defRPr sz="1500">
+                <a:solidFill>
+                  <a:srgbClr val="FFFFFF"/>
+                </a:solidFill>
+              </a:defRPr>
+            </a:pPr>
+            <a:r>
+              <a:t>   00878       530,850  (+30.2%)  國泰永續高股息</a:t>
             </a:r>
           </a:p>
           <a:p>
@@ -4671,7 +4671,7 @@
               </a:defRPr>
             </a:pPr>
             <a:r>
-              <a:t>   00981A      236,240  (+12.2%)  主動統一台灣增長</a:t>
+              <a:t>   00981A      231,040  (+9.7%)  主動統一台灣增長</a:t>
             </a:r>
           </a:p>
           <a:p>
@@ -4866,7 +4866,7 @@
               </a:defRPr>
             </a:pPr>
             <a:r>
-              <a:t>基金總市值 12,710,436 元（snapshot 9/4 報價日 9/3）</a:t>
+              <a:t>基金總市值 12,822,205 元（snapshot 9/4 報價日 9/3）</a:t>
             </a:r>
           </a:p>
         </p:txBody>
@@ -4934,22 +4934,22 @@
               </a:defRPr>
             </a:pPr>
             <a:r>
-              <a:t>     貝萊德B11 強化穩定月配息 5,023,075 元（原 MMF 500 萬贖回款轉申購；⛔ 原「500萬標案預備金」已作廢 9/11）</a:t>
-            </a:r>
-          </a:p>
-          <a:p>
-            <a:pPr>
-              <a:spcAft>
-                <a:spcPts val="500"/>
-              </a:spcAft>
-              <a:defRPr sz="1500">
-                <a:solidFill>
-                  <a:srgbClr val="FFFFFF"/>
-                </a:solidFill>
-              </a:defRPr>
-            </a:pPr>
-            <a:r>
-              <a:t>     聯博全球多元收益AD美元月配 980,225 元</a:t>
+              <a:t>     貝萊德B11 強化穩定月配息 5,091,166 元（原 MMF 500 萬贖回款轉申購；⛔ 原「500萬標案預備金」已作廢 9/11）</a:t>
+            </a:r>
+          </a:p>
+          <a:p>
+            <a:pPr>
+              <a:spcAft>
+                <a:spcPts val="500"/>
+              </a:spcAft>
+              <a:defRPr sz="1500">
+                <a:solidFill>
+                  <a:srgbClr val="FFFFFF"/>
+                </a:solidFill>
+              </a:defRPr>
+            </a:pPr>
+            <a:r>
+              <a:t>     聯博全球多元收益AD美元月配 986,135 元</a:t>
             </a:r>
           </a:p>
           <a:p>
@@ -5401,7 +5401,7 @@
               </a:defRPr>
             </a:pPr>
             <a:r>
-              <a:t>穿透：台股 12.5%｜美股 36.6%（科技14.2）｜防守配息 17.8%｜債券 24.9%｜現金 4.3%</a:t>
+              <a:t>穿透：台股 11.0%｜美股 37.3%（科技14.3）｜防守配息 18.2%｜債券 25.3%｜現金 4.3%</a:t>
             </a:r>
           </a:p>
         </p:txBody>
@@ -5469,7 +5469,7 @@
               </a:defRPr>
             </a:pPr>
             <a:r>
-              <a:t>     台股穿透 12.5% → 偏低，但觀望期凍結新增</a:t>
+              <a:t>     台股穿透 11.0% → 偏低，但觀望期凍結新增</a:t>
             </a:r>
           </a:p>
           <a:p>
@@ -5729,7 +5729,7 @@
               </a:defRPr>
             </a:pPr>
             <a:r>
-              <a:t>🔴 情境A：升息（30yr 5.44% 警戒區，CPI 9/11 關鍵）</a:t>
+              <a:t>🔴 情境A：升息（30yr 5.43% 警戒區，CPI 9/11 關鍵）</a:t>
             </a:r>
           </a:p>
           <a:p>

--- a/grand_pivot_deck.pptx
+++ b/grand_pivot_deck.pptx
@@ -3209,7 +3209,7 @@
               </a:defRPr>
             </a:pPr>
             <a:r>
-              <a:t>數據基準：10/21 最新收盤（執行時自動抓取）｜ 龍九控股策略框架 9/6 核准</a:t>
+              <a:t>數據基準：10/23 最新收盤（執行時自動抓取）｜ 龍九控股策略框架 9/6 核准</a:t>
             </a:r>
           </a:p>
           <a:p>
@@ -3798,7 +3798,7 @@
               </a:defRPr>
             </a:pPr>
             <a:r>
-              <a:t>📈 台股 46,888（10/21 收盤，單日 +1.28%）→ 無系統風險，不恐慌不追高</a:t>
+              <a:t>📈 台股 46,041（10/23 收盤，單日 -1.81%）→ 無系統風險，不恐慌不追高</a:t>
             </a:r>
           </a:p>
           <a:p>
@@ -3943,7 +3943,7 @@
               </a:defRPr>
             </a:pPr>
             <a:r>
-              <a:t>即時市場：台股 46,888（+1.28%）</a:t>
+              <a:t>即時市場：台股 46,041（-1.81%）</a:t>
             </a:r>
           </a:p>
         </p:txBody>
@@ -3978,7 +3978,7 @@
               </a:defRPr>
             </a:pPr>
             <a:r>
-              <a:t>台股位處近一月高檔區 — 無系統性風險 ｜ 近一月低點 46,293</a:t>
+              <a:t>近一月仍在低檔整理 — 維持觀望 ｜ 近一月低點 46,041</a:t>
             </a:r>
           </a:p>
         </p:txBody>
@@ -4016,7 +4016,7 @@
               </a:defRPr>
             </a:pPr>
             <a:r>
-              <a:t>📈 台股最新收盤 46,888（單日 +1.28%），asof 10/21</a:t>
+              <a:t>📈 台股最新收盤 46,041（單日 -1.81%），asof 10/23</a:t>
             </a:r>
           </a:p>
           <a:p>
@@ -4100,7 +4100,7 @@
               </a:defRPr>
             </a:pPr>
             <a:r>
-              <a:t>📡 10yr 5.12% / 30yr 5.43% — 已達 5.30 凍結線，新增質押全域凍結</a:t>
+              <a:t>📡 10yr 4.99% / 30yr 5.32% — 已達 5.30 凍結線，新增質押全域凍結</a:t>
             </a:r>
           </a:p>
           <a:p>
@@ -4176,7 +4176,7 @@
               </a:defRPr>
             </a:pPr>
             <a:r>
-              <a:t>匯率 32.41 — 台幣偏弱</a:t>
+              <a:t>匯率 32.57 — 台幣偏弱</a:t>
             </a:r>
           </a:p>
         </p:txBody>
@@ -4211,7 +4211,7 @@
               </a:defRPr>
             </a:pPr>
             <a:r>
-              <a:t>美元曝險 69.0%（🟡 僅顯示，門檻 60；政策門檻待 10 月戰略檢討）</a:t>
+              <a:t>美元曝險 69.1%（🟡 僅顯示，門檻 60；政策門檻待 10 月戰略檢討）</a:t>
             </a:r>
           </a:p>
         </p:txBody>
@@ -4264,7 +4264,7 @@
               </a:defRPr>
             </a:pPr>
             <a:r>
-              <a:t>     7/29 高點 32.38 → 如今 32.41（台幣偏弱 -0.1%）</a:t>
+              <a:t>     7/29 高點 32.38 → 如今 32.57（台幣偏弱 -0.6%）</a:t>
             </a:r>
           </a:p>
           <a:p>
@@ -4501,7 +4501,7 @@
               </a:defRPr>
             </a:pPr>
             <a:r>
-              <a:t>證券總市值 2,784,660 元（snapshot 9/4）— 台股 8/24 裁示暫緩、9/6 全面觀望</a:t>
+              <a:t>證券總市值 2,794,920 元（snapshot 9/4）— 台股 8/24 裁示暫緩、9/6 全面觀望</a:t>
             </a:r>
           </a:p>
         </p:txBody>
@@ -4566,112 +4566,112 @@
               </a:defRPr>
             </a:pPr>
             <a:r>
-              <a:t>   0050        216,300  (+27.4%)  元大台灣50</a:t>
-            </a:r>
-          </a:p>
-          <a:p>
-            <a:pPr>
-              <a:spcAft>
-                <a:spcPts val="500"/>
-              </a:spcAft>
-              <a:defRPr sz="1500">
-                <a:solidFill>
-                  <a:srgbClr val="FFFFFF"/>
-                </a:solidFill>
-              </a:defRPr>
-            </a:pPr>
-            <a:r>
-              <a:t>   006208      495,200  (+25.8%)  富邦台50</a:t>
-            </a:r>
-          </a:p>
-          <a:p>
-            <a:pPr>
-              <a:spcAft>
-                <a:spcPts val="500"/>
-              </a:spcAft>
-              <a:defRPr sz="1500">
-                <a:solidFill>
-                  <a:srgbClr val="FFFFFF"/>
-                </a:solidFill>
-              </a:defRPr>
-            </a:pPr>
-            <a:r>
-              <a:t>   009816      257,280  (+28.7%)  凱基台灣TOP50</a:t>
-            </a:r>
-          </a:p>
-          <a:p>
-            <a:pPr>
-              <a:spcAft>
-                <a:spcPts val="500"/>
-              </a:spcAft>
-              <a:defRPr sz="1500">
-                <a:solidFill>
-                  <a:srgbClr val="FFFFFF"/>
-                </a:solidFill>
-              </a:defRPr>
-            </a:pPr>
-            <a:r>
-              <a:t>   00646        79,200  (+10.6%)  元大S&amp;P500</a:t>
-            </a:r>
-          </a:p>
-          <a:p>
-            <a:pPr>
-              <a:spcAft>
-                <a:spcPts val="500"/>
-              </a:spcAft>
-              <a:defRPr sz="1500">
-                <a:solidFill>
-                  <a:srgbClr val="FFFFFF"/>
-                </a:solidFill>
-              </a:defRPr>
-            </a:pPr>
-            <a:r>
-              <a:t>   00713       130,600  (+19.2%)  元大台灣高息低波</a:t>
-            </a:r>
-          </a:p>
-          <a:p>
-            <a:pPr>
-              <a:spcAft>
-                <a:spcPts val="500"/>
-              </a:spcAft>
-              <a:defRPr sz="1500">
-                <a:solidFill>
-                  <a:srgbClr val="FFFFFF"/>
-                </a:solidFill>
-              </a:defRPr>
-            </a:pPr>
-            <a:r>
-              <a:t>   00878       530,850  (+30.2%)  國泰永續高股息</a:t>
-            </a:r>
-          </a:p>
-          <a:p>
-            <a:pPr>
-              <a:spcAft>
-                <a:spcPts val="500"/>
-              </a:spcAft>
-              <a:defRPr sz="1500">
-                <a:solidFill>
-                  <a:srgbClr val="FFFFFF"/>
-                </a:solidFill>
-              </a:defRPr>
-            </a:pPr>
-            <a:r>
-              <a:t>   0056         58,750  (+58.1%)  元大高股息</a:t>
-            </a:r>
-          </a:p>
-          <a:p>
-            <a:pPr>
-              <a:spcAft>
-                <a:spcPts val="500"/>
-              </a:spcAft>
-              <a:defRPr sz="1500">
-                <a:solidFill>
-                  <a:srgbClr val="FFFFFF"/>
-                </a:solidFill>
-              </a:defRPr>
-            </a:pPr>
-            <a:r>
-              <a:t>   00981A      231,040  (+9.7%)  主動統一台灣增長</a:t>
+              <a:t>   0050        213,800  (+25.9%)  元大台灣50</a:t>
+            </a:r>
+          </a:p>
+          <a:p>
+            <a:pPr>
+              <a:spcAft>
+                <a:spcPts val="500"/>
+              </a:spcAft>
+              <a:defRPr sz="1500">
+                <a:solidFill>
+                  <a:srgbClr val="FFFFFF"/>
+                </a:solidFill>
+              </a:defRPr>
+            </a:pPr>
+            <a:r>
+              <a:t>   006208      489,700  (+24.4%)  富邦台50</a:t>
+            </a:r>
+          </a:p>
+          <a:p>
+            <a:pPr>
+              <a:spcAft>
+                <a:spcPts val="500"/>
+              </a:spcAft>
+              <a:defRPr sz="1500">
+                <a:solidFill>
+                  <a:srgbClr val="FFFFFF"/>
+                </a:solidFill>
+              </a:defRPr>
+            </a:pPr>
+            <a:r>
+              <a:t>   009816      254,880  (+27.5%)  凱基台灣TOP50</a:t>
+            </a:r>
+          </a:p>
+          <a:p>
+            <a:pPr>
+              <a:spcAft>
+                <a:spcPts val="500"/>
+              </a:spcAft>
+              <a:defRPr sz="1500">
+                <a:solidFill>
+                  <a:srgbClr val="FFFFFF"/>
+                </a:solidFill>
+              </a:defRPr>
+            </a:pPr>
+            <a:r>
+              <a:t>   00646        78,950  (+10.3%)  元大S&amp;P500</a:t>
+            </a:r>
+          </a:p>
+          <a:p>
+            <a:pPr>
+              <a:spcAft>
+                <a:spcPts val="500"/>
+              </a:spcAft>
+              <a:defRPr sz="1500">
+                <a:solidFill>
+                  <a:srgbClr val="FFFFFF"/>
+                </a:solidFill>
+              </a:defRPr>
+            </a:pPr>
+            <a:r>
+              <a:t>   00713       131,800  (+20.3%)  元大台灣高息低波</a:t>
+            </a:r>
+          </a:p>
+          <a:p>
+            <a:pPr>
+              <a:spcAft>
+                <a:spcPts val="500"/>
+              </a:spcAft>
+              <a:defRPr sz="1500">
+                <a:solidFill>
+                  <a:srgbClr val="FFFFFF"/>
+                </a:solidFill>
+              </a:defRPr>
+            </a:pPr>
+            <a:r>
+              <a:t>   00878       529,050  (+29.8%)  國泰永續高股息</a:t>
+            </a:r>
+          </a:p>
+          <a:p>
+            <a:pPr>
+              <a:spcAft>
+                <a:spcPts val="500"/>
+              </a:spcAft>
+              <a:defRPr sz="1500">
+                <a:solidFill>
+                  <a:srgbClr val="FFFFFF"/>
+                </a:solidFill>
+              </a:defRPr>
+            </a:pPr>
+            <a:r>
+              <a:t>   0056         56,300  (+51.5%)  元大高股息</a:t>
+            </a:r>
+          </a:p>
+          <a:p>
+            <a:pPr>
+              <a:spcAft>
+                <a:spcPts val="500"/>
+              </a:spcAft>
+              <a:defRPr sz="1500">
+                <a:solidFill>
+                  <a:srgbClr val="FFFFFF"/>
+                </a:solidFill>
+              </a:defRPr>
+            </a:pPr>
+            <a:r>
+              <a:t>   00981A      225,520  (+7.1%)  主動統一台股增長</a:t>
             </a:r>
           </a:p>
           <a:p>
@@ -4866,7 +4866,7 @@
               </a:defRPr>
             </a:pPr>
             <a:r>
-              <a:t>基金總市值 12,822,205 元（snapshot 9/4 報價日 9/3）</a:t>
+              <a:t>基金總市值 12,791,770 元（snapshot 9/4 報價日 9/3）</a:t>
             </a:r>
           </a:p>
         </p:txBody>
@@ -4934,22 +4934,22 @@
               </a:defRPr>
             </a:pPr>
             <a:r>
-              <a:t>     貝萊德B11 強化穩定月配息 5,091,166 元（原 MMF 500 萬贖回款轉申購；⛔ 原「500萬標案預備金」已作廢 9/11）</a:t>
-            </a:r>
-          </a:p>
-          <a:p>
-            <a:pPr>
-              <a:spcAft>
-                <a:spcPts val="500"/>
-              </a:spcAft>
-              <a:defRPr sz="1500">
-                <a:solidFill>
-                  <a:srgbClr val="FFFFFF"/>
-                </a:solidFill>
-              </a:defRPr>
-            </a:pPr>
-            <a:r>
-              <a:t>     聯博全球多元收益AD美元月配 986,135 元</a:t>
+              <a:t>     貝萊德B11 強化穩定月配息 5,071,555 元（原 MMF 500 萬贖回款轉申購；⛔ 原「500萬標案預備金」已作廢 9/11）</a:t>
+            </a:r>
+          </a:p>
+          <a:p>
+            <a:pPr>
+              <a:spcAft>
+                <a:spcPts val="500"/>
+              </a:spcAft>
+              <a:defRPr sz="1500">
+                <a:solidFill>
+                  <a:srgbClr val="FFFFFF"/>
+                </a:solidFill>
+              </a:defRPr>
+            </a:pPr>
+            <a:r>
+              <a:t>     聯博全球多元收益AD美元月配 982,585 元</a:t>
             </a:r>
           </a:p>
           <a:p>
@@ -5401,7 +5401,7 @@
               </a:defRPr>
             </a:pPr>
             <a:r>
-              <a:t>穿透：台股 11.0%｜美股 37.3%（科技14.3）｜防守配息 18.2%｜債券 25.3%｜現金 4.3%</a:t>
+              <a:t>穿透：台股 11.0%｜美股 37.3%（科技14.2）｜防守配息 18.1%｜債券 25.3%｜現金 4.5%</a:t>
             </a:r>
           </a:p>
         </p:txBody>
@@ -5580,7 +5580,7 @@
               </a:defRPr>
             </a:pPr>
             <a:r>
-              <a:t>📊 現金/安全網穿透 4.3%：底線 70 萬已守住</a:t>
+              <a:t>📊 現金/安全網穿透 4.5%：底線 70 萬已守住</a:t>
             </a:r>
           </a:p>
           <a:p>
@@ -5729,7 +5729,7 @@
               </a:defRPr>
             </a:pPr>
             <a:r>
-              <a:t>🔴 情境A：升息（30yr 5.43% 警戒區，CPI 9/11 關鍵）</a:t>
+              <a:t>🔴 情境A：升息（30yr 5.32% 警戒區，CPI 9/11 關鍵）</a:t>
             </a:r>
           </a:p>
           <a:p>
